--- a/output/wordlabs-graph-3day.pptx
+++ b/output/wordlabs-graph-3day.pptx
@@ -6040,7 +6040,7 @@
                 <a:ea typeface="Calibri" pitchFamily="34" charset="-122"/>
                 <a:cs typeface="Calibri" pitchFamily="34" charset="-120"/>
               </a:rPr>
-              <a:t>My teacher asked me to write a </a:t>
+              <a:t>The </a:t>
             </a:r>
             <a:pPr algn="l" indent="0" marL="0">
               <a:buNone/>
@@ -6071,7 +6071,7 @@
                 <a:ea typeface="Calibri" pitchFamily="34" charset="-122"/>
                 <a:cs typeface="Calibri" pitchFamily="34" charset="-120"/>
               </a:rPr>
-              <a:t> about how a </a:t>
+              <a:t> described how a </a:t>
             </a:r>
             <a:pPr algn="l" indent="0" marL="0">
               <a:buNone/>
@@ -6102,7 +6102,7 @@
                 <a:ea typeface="Calibri" pitchFamily="34" charset="-122"/>
                 <a:cs typeface="Calibri" pitchFamily="34" charset="-120"/>
               </a:rPr>
-              <a:t> can tell a whole story.</a:t>
+              <a:t> can tell a story without any words.</a:t>
             </a:r>
             <a:endParaRPr lang="en-US" sz="1800" dirty="0"/>
           </a:p>
@@ -7972,7 +7972,7 @@
                 <a:ea typeface="Calibri" pitchFamily="34" charset="-122"/>
                 <a:cs typeface="Calibri" pitchFamily="34" charset="-120"/>
               </a:rPr>
-              <a:t>write, draw, record</a:t>
+              <a:t>write, record</a:t>
             </a:r>
             <a:endParaRPr lang="en-US" sz="850" dirty="0"/>
           </a:p>
@@ -8957,7 +8957,7 @@
                 <a:ea typeface="Calibri" pitchFamily="34" charset="-122"/>
                 <a:cs typeface="Calibri" pitchFamily="34" charset="-120"/>
               </a:rPr>
-              <a:t>write, draw, record</a:t>
+              <a:t>write, record</a:t>
             </a:r>
             <a:endParaRPr lang="en-US" sz="850" dirty="0"/>
           </a:p>
@@ -10179,7 +10179,7 @@
                 <a:ea typeface="Calibri" pitchFamily="34" charset="-122"/>
                 <a:cs typeface="Calibri" pitchFamily="34" charset="-120"/>
               </a:rPr>
-              <a:t>write, draw, record</a:t>
+              <a:t>write, record</a:t>
             </a:r>
             <a:endParaRPr lang="en-US" sz="850" dirty="0"/>
           </a:p>
@@ -10655,7 +10655,7 @@
         </p:nvSpPr>
         <p:spPr>
           <a:xfrm>
-            <a:off x="2254649" y="4169664"/>
+            <a:off x="2124837" y="4169664"/>
             <a:ext cx="685800" cy="384048"/>
           </a:xfrm>
           <a:prstGeom prst="rect">
@@ -10682,7 +10682,7 @@
         </p:nvSpPr>
         <p:spPr>
           <a:xfrm>
-            <a:off x="2254649" y="4169664"/>
+            <a:off x="2124837" y="4169664"/>
             <a:ext cx="685800" cy="384048"/>
           </a:xfrm>
           <a:prstGeom prst="rect">
@@ -10721,7 +10721,7 @@
         </p:nvSpPr>
         <p:spPr>
           <a:xfrm>
-            <a:off x="3293146" y="4169664"/>
+            <a:off x="3033522" y="4169664"/>
             <a:ext cx="685800" cy="384048"/>
           </a:xfrm>
           <a:prstGeom prst="rect">
@@ -10748,7 +10748,7 @@
         </p:nvSpPr>
         <p:spPr>
           <a:xfrm>
-            <a:off x="3293146" y="4169664"/>
+            <a:off x="3033522" y="4169664"/>
             <a:ext cx="685800" cy="384048"/>
           </a:xfrm>
           <a:prstGeom prst="rect">
@@ -10787,7 +10787,7 @@
         </p:nvSpPr>
         <p:spPr>
           <a:xfrm>
-            <a:off x="4331643" y="4169664"/>
+            <a:off x="3942207" y="4169664"/>
             <a:ext cx="685800" cy="384048"/>
           </a:xfrm>
           <a:prstGeom prst="rect">
@@ -10814,7 +10814,7 @@
         </p:nvSpPr>
         <p:spPr>
           <a:xfrm>
-            <a:off x="4331643" y="4169664"/>
+            <a:off x="3942207" y="4169664"/>
             <a:ext cx="685800" cy="384048"/>
           </a:xfrm>
           <a:prstGeom prst="rect">
@@ -10853,7 +10853,7 @@
         </p:nvSpPr>
         <p:spPr>
           <a:xfrm>
-            <a:off x="5370141" y="4169664"/>
+            <a:off x="4850892" y="4169664"/>
             <a:ext cx="685800" cy="384048"/>
           </a:xfrm>
           <a:prstGeom prst="rect">
@@ -10880,7 +10880,7 @@
         </p:nvSpPr>
         <p:spPr>
           <a:xfrm>
-            <a:off x="5370141" y="4169664"/>
+            <a:off x="4850892" y="4169664"/>
             <a:ext cx="685800" cy="384048"/>
           </a:xfrm>
           <a:prstGeom prst="rect">
@@ -10905,7 +10905,7 @@
                 <a:ea typeface="Trebuchet MS" pitchFamily="34" charset="-122"/>
                 <a:cs typeface="Trebuchet MS" pitchFamily="34" charset="-120"/>
               </a:rPr>
-              <a:t>gr</a:t>
+              <a:t>g</a:t>
             </a:r>
             <a:endParaRPr lang="en-US" sz="900" dirty="0"/>
           </a:p>
@@ -10919,7 +10919,7 @@
         </p:nvSpPr>
         <p:spPr>
           <a:xfrm>
-            <a:off x="6408638" y="4169664"/>
+            <a:off x="5759577" y="4169664"/>
             <a:ext cx="685800" cy="384048"/>
           </a:xfrm>
           <a:prstGeom prst="rect">
@@ -10946,7 +10946,7 @@
         </p:nvSpPr>
         <p:spPr>
           <a:xfrm>
-            <a:off x="6408638" y="4169664"/>
+            <a:off x="5759577" y="4169664"/>
             <a:ext cx="685800" cy="384048"/>
           </a:xfrm>
           <a:prstGeom prst="rect">
@@ -10971,7 +10971,7 @@
                 <a:ea typeface="Trebuchet MS" pitchFamily="34" charset="-122"/>
                 <a:cs typeface="Trebuchet MS" pitchFamily="34" charset="-120"/>
               </a:rPr>
-              <a:t>a</a:t>
+              <a:t>r</a:t>
             </a:r>
             <a:endParaRPr lang="en-US" sz="900" dirty="0"/>
           </a:p>
@@ -10985,7 +10985,7 @@
         </p:nvSpPr>
         <p:spPr>
           <a:xfrm>
-            <a:off x="7447135" y="4169664"/>
+            <a:off x="6668262" y="4169664"/>
             <a:ext cx="685800" cy="384048"/>
           </a:xfrm>
           <a:prstGeom prst="rect">
@@ -11012,7 +11012,7 @@
         </p:nvSpPr>
         <p:spPr>
           <a:xfrm>
-            <a:off x="7447135" y="4169664"/>
+            <a:off x="6668262" y="4169664"/>
             <a:ext cx="685800" cy="384048"/>
           </a:xfrm>
           <a:prstGeom prst="rect">
@@ -11037,6 +11037,72 @@
                 <a:ea typeface="Trebuchet MS" pitchFamily="34" charset="-122"/>
                 <a:cs typeface="Trebuchet MS" pitchFamily="34" charset="-120"/>
               </a:rPr>
+              <a:t>a</a:t>
+            </a:r>
+            <a:endParaRPr lang="en-US" sz="900" dirty="0"/>
+          </a:p>
+        </p:txBody>
+      </p:sp>
+      <p:sp>
+        <p:nvSpPr>
+          <p:cNvPr id="48" name="Shape 46"/>
+          <p:cNvSpPr/>
+          <p:nvPr/>
+        </p:nvSpPr>
+        <p:spPr>
+          <a:xfrm>
+            <a:off x="7576947" y="4169664"/>
+            <a:ext cx="685800" cy="384048"/>
+          </a:xfrm>
+          <a:prstGeom prst="rect">
+            <a:avLst>
+              <a:gd name="adj" fmla="val 9524"/>
+            </a:avLst>
+          </a:prstGeom>
+          <a:solidFill>
+            <a:srgbClr val="FFFFFF"/>
+          </a:solidFill>
+          <a:ln w="12700">
+            <a:solidFill>
+              <a:srgbClr val="DB2777"/>
+            </a:solidFill>
+            <a:prstDash val="solid"/>
+          </a:ln>
+        </p:spPr>
+      </p:sp>
+      <p:sp>
+        <p:nvSpPr>
+          <p:cNvPr id="49" name="Text 47"/>
+          <p:cNvSpPr/>
+          <p:nvPr/>
+        </p:nvSpPr>
+        <p:spPr>
+          <a:xfrm>
+            <a:off x="7576947" y="4169664"/>
+            <a:ext cx="685800" cy="384048"/>
+          </a:xfrm>
+          <a:prstGeom prst="rect">
+            <a:avLst/>
+          </a:prstGeom>
+          <a:noFill/>
+          <a:ln/>
+        </p:spPr>
+        <p:txBody>
+          <a:bodyPr wrap="square" lIns="0" tIns="0" rIns="0" bIns="0" rtlCol="0" anchor="ctr"/>
+          <a:lstStyle/>
+          <a:p>
+            <a:pPr algn="ctr" indent="0" marL="0">
+              <a:buNone/>
+            </a:pPr>
+            <a:r>
+              <a:rPr lang="en-US" sz="900" b="1" dirty="0">
+                <a:solidFill>
+                  <a:srgbClr val="9D174D"/>
+                </a:solidFill>
+                <a:latin typeface="Trebuchet MS" pitchFamily="34" charset="0"/>
+                <a:ea typeface="Trebuchet MS" pitchFamily="34" charset="-122"/>
+                <a:cs typeface="Trebuchet MS" pitchFamily="34" charset="-120"/>
+              </a:rPr>
               <a:t>ph</a:t>
             </a:r>
             <a:endParaRPr lang="en-US" sz="900" dirty="0"/>
@@ -11045,13 +11111,13 @@
       </p:sp>
       <p:sp>
         <p:nvSpPr>
-          <p:cNvPr id="48" name="Text 46"/>
-          <p:cNvSpPr/>
-          <p:nvPr/>
-        </p:nvSpPr>
-        <p:spPr>
-          <a:xfrm>
-            <a:off x="7447135" y="4572000"/>
+          <p:cNvPr id="50" name="Text 48"/>
+          <p:cNvSpPr/>
+          <p:nvPr/>
+        </p:nvSpPr>
+        <p:spPr>
+          <a:xfrm>
+            <a:off x="7576947" y="4572000"/>
             <a:ext cx="685800" cy="219456"/>
           </a:xfrm>
           <a:prstGeom prst="rect">
@@ -12624,7 +12690,7 @@
                 <a:ea typeface="Calibri" pitchFamily="34" charset="-122"/>
                 <a:cs typeface="Calibri" pitchFamily="34" charset="-120"/>
               </a:rPr>
-              <a:t>write, draw, record</a:t>
+              <a:t>write, record</a:t>
             </a:r>
             <a:endParaRPr lang="en-US" sz="850" dirty="0"/>
           </a:p>
@@ -13609,7 +13675,7 @@
                 <a:ea typeface="Calibri" pitchFamily="34" charset="-122"/>
                 <a:cs typeface="Calibri" pitchFamily="34" charset="-120"/>
               </a:rPr>
-              <a:t>write, draw, record</a:t>
+              <a:t>write, record</a:t>
             </a:r>
             <a:endParaRPr lang="en-US" sz="850" dirty="0"/>
           </a:p>
@@ -15096,7 +15162,7 @@
                 <a:ea typeface="Calibri" pitchFamily="34" charset="-122"/>
                 <a:cs typeface="Calibri" pitchFamily="34" charset="-120"/>
               </a:rPr>
-              <a:t>write, draw, record</a:t>
+              <a:t>write, record</a:t>
             </a:r>
             <a:endParaRPr lang="en-US" sz="850" dirty="0"/>
           </a:p>
@@ -15572,7 +15638,7 @@
         </p:nvSpPr>
         <p:spPr>
           <a:xfrm>
-            <a:off x="2124837" y="4169664"/>
+            <a:off x="2023872" y="4169664"/>
             <a:ext cx="685800" cy="384048"/>
           </a:xfrm>
           <a:prstGeom prst="rect">
@@ -15599,7 +15665,7 @@
         </p:nvSpPr>
         <p:spPr>
           <a:xfrm>
-            <a:off x="2124837" y="4169664"/>
+            <a:off x="2023872" y="4169664"/>
             <a:ext cx="685800" cy="384048"/>
           </a:xfrm>
           <a:prstGeom prst="rect">
@@ -15638,7 +15704,7 @@
         </p:nvSpPr>
         <p:spPr>
           <a:xfrm>
-            <a:off x="2124837" y="4572000"/>
+            <a:off x="2023872" y="4572000"/>
             <a:ext cx="685800" cy="219456"/>
           </a:xfrm>
           <a:prstGeom prst="rect">
@@ -15677,7 +15743,7 @@
         </p:nvSpPr>
         <p:spPr>
           <a:xfrm>
-            <a:off x="3033522" y="4169664"/>
+            <a:off x="2831592" y="4169664"/>
             <a:ext cx="685800" cy="384048"/>
           </a:xfrm>
           <a:prstGeom prst="rect">
@@ -15704,7 +15770,7 @@
         </p:nvSpPr>
         <p:spPr>
           <a:xfrm>
-            <a:off x="3033522" y="4169664"/>
+            <a:off x="2831592" y="4169664"/>
             <a:ext cx="685800" cy="384048"/>
           </a:xfrm>
           <a:prstGeom prst="rect">
@@ -15743,7 +15809,7 @@
         </p:nvSpPr>
         <p:spPr>
           <a:xfrm>
-            <a:off x="3942207" y="4169664"/>
+            <a:off x="3639312" y="4169664"/>
             <a:ext cx="685800" cy="384048"/>
           </a:xfrm>
           <a:prstGeom prst="rect">
@@ -15770,7 +15836,7 @@
         </p:nvSpPr>
         <p:spPr>
           <a:xfrm>
-            <a:off x="3942207" y="4169664"/>
+            <a:off x="3639312" y="4169664"/>
             <a:ext cx="685800" cy="384048"/>
           </a:xfrm>
           <a:prstGeom prst="rect">
@@ -15809,7 +15875,7 @@
         </p:nvSpPr>
         <p:spPr>
           <a:xfrm>
-            <a:off x="4850892" y="4169664"/>
+            <a:off x="4447032" y="4169664"/>
             <a:ext cx="685800" cy="384048"/>
           </a:xfrm>
           <a:prstGeom prst="rect">
@@ -15836,7 +15902,7 @@
         </p:nvSpPr>
         <p:spPr>
           <a:xfrm>
-            <a:off x="4850892" y="4169664"/>
+            <a:off x="4447032" y="4169664"/>
             <a:ext cx="685800" cy="384048"/>
           </a:xfrm>
           <a:prstGeom prst="rect">
@@ -15875,7 +15941,7 @@
         </p:nvSpPr>
         <p:spPr>
           <a:xfrm>
-            <a:off x="5759577" y="4169664"/>
+            <a:off x="5254752" y="4169664"/>
             <a:ext cx="685800" cy="384048"/>
           </a:xfrm>
           <a:prstGeom prst="rect">
@@ -15902,7 +15968,7 @@
         </p:nvSpPr>
         <p:spPr>
           <a:xfrm>
-            <a:off x="5759577" y="4169664"/>
+            <a:off x="5254752" y="4169664"/>
             <a:ext cx="685800" cy="384048"/>
           </a:xfrm>
           <a:prstGeom prst="rect">
@@ -15927,7 +15993,7 @@
                 <a:ea typeface="Trebuchet MS" pitchFamily="34" charset="-122"/>
                 <a:cs typeface="Trebuchet MS" pitchFamily="34" charset="-120"/>
               </a:rPr>
-              <a:t>gr</a:t>
+              <a:t>g</a:t>
             </a:r>
             <a:endParaRPr lang="en-US" sz="900" dirty="0"/>
           </a:p>
@@ -15941,7 +16007,7 @@
         </p:nvSpPr>
         <p:spPr>
           <a:xfrm>
-            <a:off x="6668262" y="4169664"/>
+            <a:off x="6062472" y="4169664"/>
             <a:ext cx="685800" cy="384048"/>
           </a:xfrm>
           <a:prstGeom prst="rect">
@@ -15968,7 +16034,7 @@
         </p:nvSpPr>
         <p:spPr>
           <a:xfrm>
-            <a:off x="6668262" y="4169664"/>
+            <a:off x="6062472" y="4169664"/>
             <a:ext cx="685800" cy="384048"/>
           </a:xfrm>
           <a:prstGeom prst="rect">
@@ -15993,7 +16059,7 @@
                 <a:ea typeface="Trebuchet MS" pitchFamily="34" charset="-122"/>
                 <a:cs typeface="Trebuchet MS" pitchFamily="34" charset="-120"/>
               </a:rPr>
-              <a:t>a</a:t>
+              <a:t>r</a:t>
             </a:r>
             <a:endParaRPr lang="en-US" sz="900" dirty="0"/>
           </a:p>
@@ -16007,7 +16073,7 @@
         </p:nvSpPr>
         <p:spPr>
           <a:xfrm>
-            <a:off x="7576947" y="4169664"/>
+            <a:off x="6870192" y="4169664"/>
             <a:ext cx="685800" cy="384048"/>
           </a:xfrm>
           <a:prstGeom prst="rect">
@@ -16034,7 +16100,7 @@
         </p:nvSpPr>
         <p:spPr>
           <a:xfrm>
-            <a:off x="7576947" y="4169664"/>
+            <a:off x="6870192" y="4169664"/>
             <a:ext cx="685800" cy="384048"/>
           </a:xfrm>
           <a:prstGeom prst="rect">
@@ -16059,6 +16125,72 @@
                 <a:ea typeface="Trebuchet MS" pitchFamily="34" charset="-122"/>
                 <a:cs typeface="Trebuchet MS" pitchFamily="34" charset="-120"/>
               </a:rPr>
+              <a:t>a</a:t>
+            </a:r>
+            <a:endParaRPr lang="en-US" sz="900" dirty="0"/>
+          </a:p>
+        </p:txBody>
+      </p:sp>
+      <p:sp>
+        <p:nvSpPr>
+          <p:cNvPr id="51" name="Shape 49"/>
+          <p:cNvSpPr/>
+          <p:nvPr/>
+        </p:nvSpPr>
+        <p:spPr>
+          <a:xfrm>
+            <a:off x="7677912" y="4169664"/>
+            <a:ext cx="685800" cy="384048"/>
+          </a:xfrm>
+          <a:prstGeom prst="rect">
+            <a:avLst>
+              <a:gd name="adj" fmla="val 9524"/>
+            </a:avLst>
+          </a:prstGeom>
+          <a:solidFill>
+            <a:srgbClr val="FFFFFF"/>
+          </a:solidFill>
+          <a:ln w="12700">
+            <a:solidFill>
+              <a:srgbClr val="DB2777"/>
+            </a:solidFill>
+            <a:prstDash val="solid"/>
+          </a:ln>
+        </p:spPr>
+      </p:sp>
+      <p:sp>
+        <p:nvSpPr>
+          <p:cNvPr id="52" name="Text 50"/>
+          <p:cNvSpPr/>
+          <p:nvPr/>
+        </p:nvSpPr>
+        <p:spPr>
+          <a:xfrm>
+            <a:off x="7677912" y="4169664"/>
+            <a:ext cx="685800" cy="384048"/>
+          </a:xfrm>
+          <a:prstGeom prst="rect">
+            <a:avLst/>
+          </a:prstGeom>
+          <a:noFill/>
+          <a:ln/>
+        </p:spPr>
+        <p:txBody>
+          <a:bodyPr wrap="square" lIns="0" tIns="0" rIns="0" bIns="0" rtlCol="0" anchor="ctr"/>
+          <a:lstStyle/>
+          <a:p>
+            <a:pPr algn="ctr" indent="0" marL="0">
+              <a:buNone/>
+            </a:pPr>
+            <a:r>
+              <a:rPr lang="en-US" sz="900" b="1" dirty="0">
+                <a:solidFill>
+                  <a:srgbClr val="9D174D"/>
+                </a:solidFill>
+                <a:latin typeface="Trebuchet MS" pitchFamily="34" charset="0"/>
+                <a:ea typeface="Trebuchet MS" pitchFamily="34" charset="-122"/>
+                <a:cs typeface="Trebuchet MS" pitchFamily="34" charset="-120"/>
+              </a:rPr>
               <a:t>ph</a:t>
             </a:r>
             <a:endParaRPr lang="en-US" sz="900" dirty="0"/>
@@ -16067,13 +16199,13 @@
       </p:sp>
       <p:sp>
         <p:nvSpPr>
-          <p:cNvPr id="51" name="Text 49"/>
-          <p:cNvSpPr/>
-          <p:nvPr/>
-        </p:nvSpPr>
-        <p:spPr>
-          <a:xfrm>
-            <a:off x="7576947" y="4572000"/>
+          <p:cNvPr id="53" name="Text 51"/>
+          <p:cNvSpPr/>
+          <p:nvPr/>
+        </p:nvSpPr>
+        <p:spPr>
+          <a:xfrm>
+            <a:off x="7677912" y="4572000"/>
             <a:ext cx="685800" cy="219456"/>
           </a:xfrm>
           <a:prstGeom prst="rect">
@@ -17006,7 +17138,7 @@
                 <a:ea typeface="Trebuchet MS" pitchFamily="34" charset="-122"/>
                 <a:cs typeface="Trebuchet MS" pitchFamily="34" charset="-120"/>
               </a:rPr>
-              <a:t>2</a:t>
+              <a:t>1</a:t>
             </a:r>
             <a:pPr algn="ctr" indent="0" marL="0">
               <a:buNone/>
@@ -17020,7 +17152,7 @@
                 <a:ea typeface="Trebuchet MS" pitchFamily="34" charset="-122"/>
                 <a:cs typeface="Trebuchet MS" pitchFamily="34" charset="-120"/>
               </a:rPr>
-              <a:t>  punctuation marks</a:t>
+              <a:t>  punctuation mark</a:t>
             </a:r>
             <a:endParaRPr lang="en-US" sz="2800" dirty="0"/>
           </a:p>
@@ -17424,7 +17556,7 @@
                 <a:ea typeface="Calibri" pitchFamily="34" charset="-122"/>
                 <a:cs typeface="Calibri" pitchFamily="34" charset="-120"/>
               </a:rPr>
-              <a:t>The </a:t>
+              <a:t>In </a:t>
             </a:r>
             <a:pPr algn="l" indent="0" marL="0">
               <a:buNone/>
@@ -17441,7 +17573,7 @@
                 <a:ea typeface="Calibri" pitchFamily="34" charset="-122"/>
                 <a:cs typeface="Calibri" pitchFamily="34" charset="-120"/>
               </a:rPr>
-              <a:t>biography</a:t>
+              <a:t>geography</a:t>
             </a:r>
             <a:pPr algn="l" indent="0" marL="0">
               <a:buNone/>
@@ -17455,7 +17587,7 @@
                 <a:ea typeface="Calibri" pitchFamily="34" charset="-122"/>
                 <a:cs typeface="Calibri" pitchFamily="34" charset="-120"/>
               </a:rPr>
-              <a:t> included an </a:t>
+              <a:t> class, we learned how a </a:t>
             </a:r>
             <a:pPr algn="l" indent="0" marL="0">
               <a:buNone/>
@@ -17472,7 +17604,7 @@
                 <a:ea typeface="Calibri" pitchFamily="34" charset="-122"/>
                 <a:cs typeface="Calibri" pitchFamily="34" charset="-120"/>
               </a:rPr>
-              <a:t>autograph</a:t>
+              <a:t>biography</a:t>
             </a:r>
             <a:pPr algn="l" indent="0" marL="0">
               <a:buNone/>
@@ -17486,7 +17618,7 @@
                 <a:ea typeface="Calibri" pitchFamily="34" charset="-122"/>
                 <a:cs typeface="Calibri" pitchFamily="34" charset="-120"/>
               </a:rPr>
-              <a:t> from the author, as well as a </a:t>
+              <a:t> can include a </a:t>
             </a:r>
             <a:pPr algn="l" indent="0" marL="0">
               <a:buNone/>
@@ -17517,7 +17649,7 @@
                 <a:ea typeface="Calibri" pitchFamily="34" charset="-122"/>
                 <a:cs typeface="Calibri" pitchFamily="34" charset="-120"/>
               </a:rPr>
-              <a:t> showing his life timeline.</a:t>
+              <a:t> timeline of someone's life.</a:t>
             </a:r>
             <a:endParaRPr lang="en-US" sz="1800" dirty="0"/>
           </a:p>
@@ -17672,7 +17804,7 @@
                 <a:ea typeface="Trebuchet MS" pitchFamily="34" charset="-122"/>
                 <a:cs typeface="Trebuchet MS" pitchFamily="34" charset="-120"/>
               </a:rPr>
-              <a:t>biography</a:t>
+              <a:t>geography</a:t>
             </a:r>
             <a:endParaRPr lang="en-US" sz="1400" dirty="0"/>
           </a:p>
@@ -17800,7 +17932,7 @@
                 <a:ea typeface="Trebuchet MS" pitchFamily="34" charset="-122"/>
                 <a:cs typeface="Trebuchet MS" pitchFamily="34" charset="-120"/>
               </a:rPr>
-              <a:t>autograph</a:t>
+              <a:t>biography</a:t>
             </a:r>
             <a:endParaRPr lang="en-US" sz="1400" dirty="0"/>
           </a:p>
@@ -18398,7 +18530,7 @@
                 <a:ea typeface="Trebuchet MS" pitchFamily="34" charset="-122"/>
                 <a:cs typeface="Trebuchet MS" pitchFamily="34" charset="-120"/>
               </a:rPr>
-              <a:t>biography</a:t>
+              <a:t>geography</a:t>
             </a:r>
             <a:endParaRPr lang="en-US" sz="2800" dirty="0"/>
           </a:p>
@@ -19225,7 +19357,7 @@
                 <a:ea typeface="Trebuchet MS" pitchFamily="34" charset="-122"/>
                 <a:cs typeface="Trebuchet MS" pitchFamily="34" charset="-120"/>
               </a:rPr>
-              <a:t>biography</a:t>
+              <a:t>geography</a:t>
             </a:r>
             <a:endParaRPr lang="en-US" sz="2800" dirty="0"/>
           </a:p>
@@ -19364,7 +19496,7 @@
                 <a:ea typeface="Trebuchet MS" pitchFamily="34" charset="-122"/>
                 <a:cs typeface="Trebuchet MS" pitchFamily="34" charset="-120"/>
               </a:rPr>
-              <a:t>bio</a:t>
+              <a:t>geo</a:t>
             </a:r>
             <a:endParaRPr lang="en-US" sz="1300" dirty="0"/>
           </a:p>
@@ -19403,7 +19535,7 @@
                 <a:ea typeface="Calibri" pitchFamily="34" charset="-122"/>
                 <a:cs typeface="Calibri" pitchFamily="34" charset="-120"/>
               </a:rPr>
-              <a:t>life</a:t>
+              <a:t>earth</a:t>
             </a:r>
             <a:endParaRPr lang="en-US" sz="850" dirty="0"/>
           </a:p>
@@ -19515,7 +19647,7 @@
                 <a:ea typeface="Calibri" pitchFamily="34" charset="-122"/>
                 <a:cs typeface="Calibri" pitchFamily="34" charset="-120"/>
               </a:rPr>
-              <a:t>write, draw, record</a:t>
+              <a:t>write, record</a:t>
             </a:r>
             <a:endParaRPr lang="en-US" sz="850" dirty="0"/>
           </a:p>
@@ -19627,7 +19759,7 @@
                 <a:ea typeface="Calibri" pitchFamily="34" charset="-122"/>
                 <a:cs typeface="Calibri" pitchFamily="34" charset="-120"/>
               </a:rPr>
-              <a:t>quality of, result of</a:t>
+              <a:t>state of, quality of</a:t>
             </a:r>
             <a:endParaRPr lang="en-US" sz="850" dirty="0"/>
           </a:p>
@@ -20322,7 +20454,7 @@
                 <a:ea typeface="Trebuchet MS" pitchFamily="34" charset="-122"/>
                 <a:cs typeface="Trebuchet MS" pitchFamily="34" charset="-120"/>
               </a:rPr>
-              <a:t>biography</a:t>
+              <a:t>geography</a:t>
             </a:r>
             <a:endParaRPr lang="en-US" sz="2800" dirty="0"/>
           </a:p>
@@ -20461,7 +20593,7 @@
                 <a:ea typeface="Trebuchet MS" pitchFamily="34" charset="-122"/>
                 <a:cs typeface="Trebuchet MS" pitchFamily="34" charset="-120"/>
               </a:rPr>
-              <a:t>bio</a:t>
+              <a:t>geo</a:t>
             </a:r>
             <a:endParaRPr lang="en-US" sz="1300" dirty="0"/>
           </a:p>
@@ -20500,7 +20632,7 @@
                 <a:ea typeface="Calibri" pitchFamily="34" charset="-122"/>
                 <a:cs typeface="Calibri" pitchFamily="34" charset="-120"/>
               </a:rPr>
-              <a:t>life</a:t>
+              <a:t>earth</a:t>
             </a:r>
             <a:endParaRPr lang="en-US" sz="850" dirty="0"/>
           </a:p>
@@ -20612,7 +20744,7 @@
                 <a:ea typeface="Calibri" pitchFamily="34" charset="-122"/>
                 <a:cs typeface="Calibri" pitchFamily="34" charset="-120"/>
               </a:rPr>
-              <a:t>write, draw, record</a:t>
+              <a:t>write, record</a:t>
             </a:r>
             <a:endParaRPr lang="en-US" sz="850" dirty="0"/>
           </a:p>
@@ -20724,7 +20856,7 @@
                 <a:ea typeface="Calibri" pitchFamily="34" charset="-122"/>
                 <a:cs typeface="Calibri" pitchFamily="34" charset="-120"/>
               </a:rPr>
-              <a:t>quality of, result of</a:t>
+              <a:t>state of, quality of</a:t>
             </a:r>
             <a:endParaRPr lang="en-US" sz="850" dirty="0"/>
           </a:p>
@@ -20883,7 +21015,7 @@
                 <a:ea typeface="Trebuchet MS" pitchFamily="34" charset="-122"/>
                 <a:cs typeface="Trebuchet MS" pitchFamily="34" charset="-120"/>
               </a:rPr>
-              <a:t>bi</a:t>
+              <a:t>ge</a:t>
             </a:r>
             <a:endParaRPr lang="en-US" sz="1400" dirty="0"/>
           </a:p>
@@ -21761,7 +21893,7 @@
                 <a:ea typeface="Trebuchet MS" pitchFamily="34" charset="-122"/>
                 <a:cs typeface="Trebuchet MS" pitchFamily="34" charset="-120"/>
               </a:rPr>
-              <a:t>biography</a:t>
+              <a:t>geography</a:t>
             </a:r>
             <a:endParaRPr lang="en-US" sz="2800" dirty="0"/>
           </a:p>
@@ -21900,7 +22032,7 @@
                 <a:ea typeface="Trebuchet MS" pitchFamily="34" charset="-122"/>
                 <a:cs typeface="Trebuchet MS" pitchFamily="34" charset="-120"/>
               </a:rPr>
-              <a:t>bio</a:t>
+              <a:t>geo</a:t>
             </a:r>
             <a:endParaRPr lang="en-US" sz="1300" dirty="0"/>
           </a:p>
@@ -21939,7 +22071,7 @@
                 <a:ea typeface="Calibri" pitchFamily="34" charset="-122"/>
                 <a:cs typeface="Calibri" pitchFamily="34" charset="-120"/>
               </a:rPr>
-              <a:t>life</a:t>
+              <a:t>earth</a:t>
             </a:r>
             <a:endParaRPr lang="en-US" sz="850" dirty="0"/>
           </a:p>
@@ -22051,7 +22183,7 @@
                 <a:ea typeface="Calibri" pitchFamily="34" charset="-122"/>
                 <a:cs typeface="Calibri" pitchFamily="34" charset="-120"/>
               </a:rPr>
-              <a:t>write, draw, record</a:t>
+              <a:t>write, record</a:t>
             </a:r>
             <a:endParaRPr lang="en-US" sz="850" dirty="0"/>
           </a:p>
@@ -22163,7 +22295,7 @@
                 <a:ea typeface="Calibri" pitchFamily="34" charset="-122"/>
                 <a:cs typeface="Calibri" pitchFamily="34" charset="-120"/>
               </a:rPr>
-              <a:t>quality of, result of</a:t>
+              <a:t>state of, quality of</a:t>
             </a:r>
             <a:endParaRPr lang="en-US" sz="850" dirty="0"/>
           </a:p>
@@ -22322,7 +22454,7 @@
                 <a:ea typeface="Trebuchet MS" pitchFamily="34" charset="-122"/>
                 <a:cs typeface="Trebuchet MS" pitchFamily="34" charset="-120"/>
               </a:rPr>
-              <a:t>bi</a:t>
+              <a:t>ge</a:t>
             </a:r>
             <a:endParaRPr lang="en-US" sz="1400" dirty="0"/>
           </a:p>
@@ -22744,7 +22876,7 @@
         </p:nvSpPr>
         <p:spPr>
           <a:xfrm>
-            <a:off x="2124837" y="4169664"/>
+            <a:off x="2023872" y="4169664"/>
             <a:ext cx="685800" cy="384048"/>
           </a:xfrm>
           <a:prstGeom prst="rect">
@@ -22771,7 +22903,7 @@
         </p:nvSpPr>
         <p:spPr>
           <a:xfrm>
-            <a:off x="2124837" y="4169664"/>
+            <a:off x="2023872" y="4169664"/>
             <a:ext cx="685800" cy="384048"/>
           </a:xfrm>
           <a:prstGeom prst="rect">
@@ -22796,7 +22928,7 @@
                 <a:ea typeface="Trebuchet MS" pitchFamily="34" charset="-122"/>
                 <a:cs typeface="Trebuchet MS" pitchFamily="34" charset="-120"/>
               </a:rPr>
-              <a:t>b</a:t>
+              <a:t>g</a:t>
             </a:r>
             <a:endParaRPr lang="en-US" sz="900" dirty="0"/>
           </a:p>
@@ -22810,7 +22942,7 @@
         </p:nvSpPr>
         <p:spPr>
           <a:xfrm>
-            <a:off x="3033522" y="4169664"/>
+            <a:off x="2831592" y="4169664"/>
             <a:ext cx="685800" cy="384048"/>
           </a:xfrm>
           <a:prstGeom prst="rect">
@@ -22837,7 +22969,7 @@
         </p:nvSpPr>
         <p:spPr>
           <a:xfrm>
-            <a:off x="3033522" y="4169664"/>
+            <a:off x="2831592" y="4169664"/>
             <a:ext cx="685800" cy="384048"/>
           </a:xfrm>
           <a:prstGeom prst="rect">
@@ -22862,7 +22994,7 @@
                 <a:ea typeface="Trebuchet MS" pitchFamily="34" charset="-122"/>
                 <a:cs typeface="Trebuchet MS" pitchFamily="34" charset="-120"/>
               </a:rPr>
-              <a:t>i</a:t>
+              <a:t>e</a:t>
             </a:r>
             <a:endParaRPr lang="en-US" sz="900" dirty="0"/>
           </a:p>
@@ -22876,7 +23008,7 @@
         </p:nvSpPr>
         <p:spPr>
           <a:xfrm>
-            <a:off x="3942207" y="4169664"/>
+            <a:off x="3639312" y="4169664"/>
             <a:ext cx="685800" cy="384048"/>
           </a:xfrm>
           <a:prstGeom prst="rect">
@@ -22903,7 +23035,7 @@
         </p:nvSpPr>
         <p:spPr>
           <a:xfrm>
-            <a:off x="3942207" y="4169664"/>
+            <a:off x="3639312" y="4169664"/>
             <a:ext cx="685800" cy="384048"/>
           </a:xfrm>
           <a:prstGeom prst="rect">
@@ -22942,7 +23074,7 @@
         </p:nvSpPr>
         <p:spPr>
           <a:xfrm>
-            <a:off x="4850892" y="4169664"/>
+            <a:off x="4447032" y="4169664"/>
             <a:ext cx="685800" cy="384048"/>
           </a:xfrm>
           <a:prstGeom prst="rect">
@@ -22969,7 +23101,7 @@
         </p:nvSpPr>
         <p:spPr>
           <a:xfrm>
-            <a:off x="4850892" y="4169664"/>
+            <a:off x="4447032" y="4169664"/>
             <a:ext cx="685800" cy="384048"/>
           </a:xfrm>
           <a:prstGeom prst="rect">
@@ -22994,7 +23126,7 @@
                 <a:ea typeface="Trebuchet MS" pitchFamily="34" charset="-122"/>
                 <a:cs typeface="Trebuchet MS" pitchFamily="34" charset="-120"/>
               </a:rPr>
-              <a:t>gr</a:t>
+              <a:t>g</a:t>
             </a:r>
             <a:endParaRPr lang="en-US" sz="900" dirty="0"/>
           </a:p>
@@ -23008,7 +23140,7 @@
         </p:nvSpPr>
         <p:spPr>
           <a:xfrm>
-            <a:off x="5759577" y="4169664"/>
+            <a:off x="5254752" y="4169664"/>
             <a:ext cx="685800" cy="384048"/>
           </a:xfrm>
           <a:prstGeom prst="rect">
@@ -23035,7 +23167,7 @@
         </p:nvSpPr>
         <p:spPr>
           <a:xfrm>
-            <a:off x="5759577" y="4169664"/>
+            <a:off x="5254752" y="4169664"/>
             <a:ext cx="685800" cy="384048"/>
           </a:xfrm>
           <a:prstGeom prst="rect">
@@ -23060,7 +23192,7 @@
                 <a:ea typeface="Trebuchet MS" pitchFamily="34" charset="-122"/>
                 <a:cs typeface="Trebuchet MS" pitchFamily="34" charset="-120"/>
               </a:rPr>
-              <a:t>a</a:t>
+              <a:t>r</a:t>
             </a:r>
             <a:endParaRPr lang="en-US" sz="900" dirty="0"/>
           </a:p>
@@ -23074,7 +23206,7 @@
         </p:nvSpPr>
         <p:spPr>
           <a:xfrm>
-            <a:off x="6668262" y="4169664"/>
+            <a:off x="6062472" y="4169664"/>
             <a:ext cx="685800" cy="384048"/>
           </a:xfrm>
           <a:prstGeom prst="rect">
@@ -23101,7 +23233,7 @@
         </p:nvSpPr>
         <p:spPr>
           <a:xfrm>
-            <a:off x="6668262" y="4169664"/>
+            <a:off x="6062472" y="4169664"/>
             <a:ext cx="685800" cy="384048"/>
           </a:xfrm>
           <a:prstGeom prst="rect">
@@ -23126,6 +23258,72 @@
                 <a:ea typeface="Trebuchet MS" pitchFamily="34" charset="-122"/>
                 <a:cs typeface="Trebuchet MS" pitchFamily="34" charset="-120"/>
               </a:rPr>
+              <a:t>a</a:t>
+            </a:r>
+            <a:endParaRPr lang="en-US" sz="900" dirty="0"/>
+          </a:p>
+        </p:txBody>
+      </p:sp>
+      <p:sp>
+        <p:nvSpPr>
+          <p:cNvPr id="54" name="Shape 52"/>
+          <p:cNvSpPr/>
+          <p:nvPr/>
+        </p:nvSpPr>
+        <p:spPr>
+          <a:xfrm>
+            <a:off x="6870192" y="4169664"/>
+            <a:ext cx="685800" cy="384048"/>
+          </a:xfrm>
+          <a:prstGeom prst="rect">
+            <a:avLst>
+              <a:gd name="adj" fmla="val 9524"/>
+            </a:avLst>
+          </a:prstGeom>
+          <a:solidFill>
+            <a:srgbClr val="FFFFFF"/>
+          </a:solidFill>
+          <a:ln w="12700">
+            <a:solidFill>
+              <a:srgbClr val="DB2777"/>
+            </a:solidFill>
+            <a:prstDash val="solid"/>
+          </a:ln>
+        </p:spPr>
+      </p:sp>
+      <p:sp>
+        <p:nvSpPr>
+          <p:cNvPr id="55" name="Text 53"/>
+          <p:cNvSpPr/>
+          <p:nvPr/>
+        </p:nvSpPr>
+        <p:spPr>
+          <a:xfrm>
+            <a:off x="6870192" y="4169664"/>
+            <a:ext cx="685800" cy="384048"/>
+          </a:xfrm>
+          <a:prstGeom prst="rect">
+            <a:avLst/>
+          </a:prstGeom>
+          <a:noFill/>
+          <a:ln/>
+        </p:spPr>
+        <p:txBody>
+          <a:bodyPr wrap="square" lIns="0" tIns="0" rIns="0" bIns="0" rtlCol="0" anchor="ctr"/>
+          <a:lstStyle/>
+          <a:p>
+            <a:pPr algn="ctr" indent="0" marL="0">
+              <a:buNone/>
+            </a:pPr>
+            <a:r>
+              <a:rPr lang="en-US" sz="900" b="1" dirty="0">
+                <a:solidFill>
+                  <a:srgbClr val="9D174D"/>
+                </a:solidFill>
+                <a:latin typeface="Trebuchet MS" pitchFamily="34" charset="0"/>
+                <a:ea typeface="Trebuchet MS" pitchFamily="34" charset="-122"/>
+                <a:cs typeface="Trebuchet MS" pitchFamily="34" charset="-120"/>
+              </a:rPr>
               <a:t>ph</a:t>
             </a:r>
             <a:endParaRPr lang="en-US" sz="900" dirty="0"/>
@@ -23134,13 +23332,13 @@
       </p:sp>
       <p:sp>
         <p:nvSpPr>
-          <p:cNvPr id="54" name="Text 52"/>
-          <p:cNvSpPr/>
-          <p:nvPr/>
-        </p:nvSpPr>
-        <p:spPr>
-          <a:xfrm>
-            <a:off x="6668262" y="4572000"/>
+          <p:cNvPr id="56" name="Text 54"/>
+          <p:cNvSpPr/>
+          <p:nvPr/>
+        </p:nvSpPr>
+        <p:spPr>
+          <a:xfrm>
+            <a:off x="6870192" y="4572000"/>
             <a:ext cx="685800" cy="219456"/>
           </a:xfrm>
           <a:prstGeom prst="rect">
@@ -23173,13 +23371,13 @@
       </p:sp>
       <p:sp>
         <p:nvSpPr>
-          <p:cNvPr id="55" name="Shape 53"/>
-          <p:cNvSpPr/>
-          <p:nvPr/>
-        </p:nvSpPr>
-        <p:spPr>
-          <a:xfrm>
-            <a:off x="7576947" y="4169664"/>
+          <p:cNvPr id="57" name="Shape 55"/>
+          <p:cNvSpPr/>
+          <p:nvPr/>
+        </p:nvSpPr>
+        <p:spPr>
+          <a:xfrm>
+            <a:off x="7677912" y="4169664"/>
             <a:ext cx="685800" cy="384048"/>
           </a:xfrm>
           <a:prstGeom prst="rect">
@@ -23200,13 +23398,13 @@
       </p:sp>
       <p:sp>
         <p:nvSpPr>
-          <p:cNvPr id="56" name="Text 54"/>
-          <p:cNvSpPr/>
-          <p:nvPr/>
-        </p:nvSpPr>
-        <p:spPr>
-          <a:xfrm>
-            <a:off x="7576947" y="4169664"/>
+          <p:cNvPr id="58" name="Text 56"/>
+          <p:cNvSpPr/>
+          <p:nvPr/>
+        </p:nvSpPr>
+        <p:spPr>
+          <a:xfrm>
+            <a:off x="7677912" y="4169664"/>
             <a:ext cx="685800" cy="384048"/>
           </a:xfrm>
           <a:prstGeom prst="rect">
@@ -23662,7 +23860,7 @@
                 <a:ea typeface="Trebuchet MS" pitchFamily="34" charset="-122"/>
                 <a:cs typeface="Trebuchet MS" pitchFamily="34" charset="-120"/>
               </a:rPr>
-              <a:t>autograph</a:t>
+              <a:t>biography</a:t>
             </a:r>
             <a:endParaRPr lang="en-US" sz="2800" dirty="0"/>
           </a:p>
@@ -24489,7 +24687,7 @@
                 <a:ea typeface="Trebuchet MS" pitchFamily="34" charset="-122"/>
                 <a:cs typeface="Trebuchet MS" pitchFamily="34" charset="-120"/>
               </a:rPr>
-              <a:t>autograph</a:t>
+              <a:t>biography</a:t>
             </a:r>
             <a:endParaRPr lang="en-US" sz="2800" dirty="0"/>
           </a:p>
@@ -24569,7 +24767,7 @@
         </p:nvSpPr>
         <p:spPr>
           <a:xfrm>
-            <a:off x="2938272" y="2258568"/>
+            <a:off x="2221992" y="2258568"/>
             <a:ext cx="1828800" cy="292608"/>
           </a:xfrm>
           <a:prstGeom prst="rect">
@@ -24603,7 +24801,7 @@
         </p:nvSpPr>
         <p:spPr>
           <a:xfrm>
-            <a:off x="2938272" y="2258568"/>
+            <a:off x="2221992" y="2258568"/>
             <a:ext cx="1828800" cy="292608"/>
           </a:xfrm>
           <a:prstGeom prst="rect">
@@ -24628,7 +24826,7 @@
                 <a:ea typeface="Trebuchet MS" pitchFamily="34" charset="-122"/>
                 <a:cs typeface="Trebuchet MS" pitchFamily="34" charset="-120"/>
               </a:rPr>
-              <a:t>auto</a:t>
+              <a:t>bio</a:t>
             </a:r>
             <a:endParaRPr lang="en-US" sz="1300" dirty="0"/>
           </a:p>
@@ -24642,7 +24840,7 @@
         </p:nvSpPr>
         <p:spPr>
           <a:xfrm>
-            <a:off x="2938272" y="2569464"/>
+            <a:off x="2221992" y="2569464"/>
             <a:ext cx="1828800" cy="201168"/>
           </a:xfrm>
           <a:prstGeom prst="rect">
@@ -24667,7 +24865,7 @@
                 <a:ea typeface="Calibri" pitchFamily="34" charset="-122"/>
                 <a:cs typeface="Calibri" pitchFamily="34" charset="-120"/>
               </a:rPr>
-              <a:t>self, own</a:t>
+              <a:t>life</a:t>
             </a:r>
             <a:endParaRPr lang="en-US" sz="850" dirty="0"/>
           </a:p>
@@ -24681,7 +24879,7 @@
         </p:nvSpPr>
         <p:spPr>
           <a:xfrm>
-            <a:off x="5803392" y="2258568"/>
+            <a:off x="4370832" y="2258568"/>
             <a:ext cx="1828800" cy="292608"/>
           </a:xfrm>
           <a:prstGeom prst="rect">
@@ -24715,7 +24913,7 @@
         </p:nvSpPr>
         <p:spPr>
           <a:xfrm>
-            <a:off x="5803392" y="2258568"/>
+            <a:off x="4370832" y="2258568"/>
             <a:ext cx="1828800" cy="292608"/>
           </a:xfrm>
           <a:prstGeom prst="rect">
@@ -24754,7 +24952,7 @@
         </p:nvSpPr>
         <p:spPr>
           <a:xfrm>
-            <a:off x="5803392" y="2569464"/>
+            <a:off x="4370832" y="2569464"/>
             <a:ext cx="1828800" cy="201168"/>
           </a:xfrm>
           <a:prstGeom prst="rect">
@@ -24779,7 +24977,7 @@
                 <a:ea typeface="Calibri" pitchFamily="34" charset="-122"/>
                 <a:cs typeface="Calibri" pitchFamily="34" charset="-120"/>
               </a:rPr>
-              <a:t>write, draw, record</a:t>
+              <a:t>write, record</a:t>
             </a:r>
             <a:endParaRPr lang="en-US" sz="850" dirty="0"/>
           </a:p>
@@ -24788,6 +24986,118 @@
       <p:sp>
         <p:nvSpPr>
           <p:cNvPr id="22" name="Shape 20"/>
+          <p:cNvSpPr/>
+          <p:nvPr/>
+        </p:nvSpPr>
+        <p:spPr>
+          <a:xfrm>
+            <a:off x="6519672" y="2258568"/>
+            <a:ext cx="1828800" cy="292608"/>
+          </a:xfrm>
+          <a:prstGeom prst="rect">
+            <a:avLst>
+              <a:gd name="adj" fmla="val 25000"/>
+            </a:avLst>
+          </a:prstGeom>
+          <a:solidFill>
+            <a:srgbClr val="FCE7F3"/>
+          </a:solidFill>
+          <a:ln w="19050">
+            <a:solidFill>
+              <a:srgbClr val="DB2777"/>
+            </a:solidFill>
+            <a:prstDash val="solid"/>
+          </a:ln>
+          <a:effectLst>
+            <a:outerShdw sx="100000" sy="100000" kx="0" ky="0" algn="bl" rotWithShape="0" blurRad="101600" dist="38100" dir="8100000">
+              <a:srgbClr val="000000">
+                <a:alpha val="12000"/>
+              </a:srgbClr>
+            </a:outerShdw>
+          </a:effectLst>
+        </p:spPr>
+      </p:sp>
+      <p:sp>
+        <p:nvSpPr>
+          <p:cNvPr id="23" name="Text 21"/>
+          <p:cNvSpPr/>
+          <p:nvPr/>
+        </p:nvSpPr>
+        <p:spPr>
+          <a:xfrm>
+            <a:off x="6519672" y="2258568"/>
+            <a:ext cx="1828800" cy="292608"/>
+          </a:xfrm>
+          <a:prstGeom prst="rect">
+            <a:avLst/>
+          </a:prstGeom>
+          <a:noFill/>
+          <a:ln/>
+        </p:spPr>
+        <p:txBody>
+          <a:bodyPr wrap="square" lIns="0" tIns="0" rIns="0" bIns="0" rtlCol="0" anchor="ctr"/>
+          <a:lstStyle/>
+          <a:p>
+            <a:pPr algn="ctr" indent="0" marL="0">
+              <a:buNone/>
+            </a:pPr>
+            <a:r>
+              <a:rPr lang="en-US" sz="1300" b="1" dirty="0">
+                <a:solidFill>
+                  <a:srgbClr val="9D174D"/>
+                </a:solidFill>
+                <a:latin typeface="Trebuchet MS" pitchFamily="34" charset="0"/>
+                <a:ea typeface="Trebuchet MS" pitchFamily="34" charset="-122"/>
+                <a:cs typeface="Trebuchet MS" pitchFamily="34" charset="-120"/>
+              </a:rPr>
+              <a:t>y</a:t>
+            </a:r>
+            <a:endParaRPr lang="en-US" sz="1300" dirty="0"/>
+          </a:p>
+        </p:txBody>
+      </p:sp>
+      <p:sp>
+        <p:nvSpPr>
+          <p:cNvPr id="24" name="Text 22"/>
+          <p:cNvSpPr/>
+          <p:nvPr/>
+        </p:nvSpPr>
+        <p:spPr>
+          <a:xfrm>
+            <a:off x="6519672" y="2569464"/>
+            <a:ext cx="1828800" cy="201168"/>
+          </a:xfrm>
+          <a:prstGeom prst="rect">
+            <a:avLst/>
+          </a:prstGeom>
+          <a:noFill/>
+          <a:ln/>
+        </p:spPr>
+        <p:txBody>
+          <a:bodyPr wrap="square" lIns="0" tIns="0" rIns="0" bIns="0" rtlCol="0" anchor="t"/>
+          <a:lstStyle/>
+          <a:p>
+            <a:pPr algn="ctr" indent="0" marL="0">
+              <a:buNone/>
+            </a:pPr>
+            <a:r>
+              <a:rPr lang="en-US" sz="850" dirty="0">
+                <a:solidFill>
+                  <a:srgbClr val="475569"/>
+                </a:solidFill>
+                <a:latin typeface="Calibri" pitchFamily="34" charset="0"/>
+                <a:ea typeface="Calibri" pitchFamily="34" charset="-122"/>
+                <a:cs typeface="Calibri" pitchFamily="34" charset="-120"/>
+              </a:rPr>
+              <a:t>state of, quality of</a:t>
+            </a:r>
+            <a:endParaRPr lang="en-US" sz="850" dirty="0"/>
+          </a:p>
+        </p:txBody>
+      </p:sp>
+      <p:sp>
+        <p:nvSpPr>
+          <p:cNvPr id="25" name="Shape 23"/>
           <p:cNvSpPr/>
           <p:nvPr/>
         </p:nvSpPr>
@@ -24814,7 +25124,7 @@
       </p:sp>
       <p:sp>
         <p:nvSpPr>
-          <p:cNvPr id="23" name="Text 21"/>
+          <p:cNvPr id="26" name="Text 24"/>
           <p:cNvSpPr/>
           <p:nvPr/>
         </p:nvSpPr>
@@ -24853,7 +25163,7 @@
       </p:sp>
       <p:sp>
         <p:nvSpPr>
-          <p:cNvPr id="24" name="Shape 22"/>
+          <p:cNvPr id="27" name="Shape 25"/>
           <p:cNvSpPr/>
           <p:nvPr/>
         </p:nvSpPr>
@@ -24880,7 +25190,7 @@
       </p:sp>
       <p:sp>
         <p:nvSpPr>
-          <p:cNvPr id="25" name="Text 23"/>
+          <p:cNvPr id="28" name="Text 26"/>
           <p:cNvSpPr/>
           <p:nvPr/>
         </p:nvSpPr>
@@ -24919,7 +25229,7 @@
       </p:sp>
       <p:sp>
         <p:nvSpPr>
-          <p:cNvPr id="26" name="Shape 24"/>
+          <p:cNvPr id="29" name="Shape 27"/>
           <p:cNvSpPr/>
           <p:nvPr/>
         </p:nvSpPr>
@@ -24946,7 +25256,7 @@
       </p:sp>
       <p:sp>
         <p:nvSpPr>
-          <p:cNvPr id="27" name="Text 25"/>
+          <p:cNvPr id="30" name="Text 28"/>
           <p:cNvSpPr/>
           <p:nvPr/>
         </p:nvSpPr>
@@ -24985,7 +25295,7 @@
       </p:sp>
       <p:sp>
         <p:nvSpPr>
-          <p:cNvPr id="28" name="Shape 26"/>
+          <p:cNvPr id="31" name="Shape 29"/>
           <p:cNvSpPr/>
           <p:nvPr/>
         </p:nvSpPr>
@@ -25012,7 +25322,7 @@
       </p:sp>
       <p:sp>
         <p:nvSpPr>
-          <p:cNvPr id="29" name="Text 27"/>
+          <p:cNvPr id="32" name="Text 30"/>
           <p:cNvSpPr/>
           <p:nvPr/>
         </p:nvSpPr>
@@ -26193,7 +26503,7 @@
                 <a:ea typeface="Trebuchet MS" pitchFamily="34" charset="-122"/>
                 <a:cs typeface="Trebuchet MS" pitchFamily="34" charset="-120"/>
               </a:rPr>
-              <a:t>autograph</a:t>
+              <a:t>biography</a:t>
             </a:r>
             <a:endParaRPr lang="en-US" sz="2800" dirty="0"/>
           </a:p>
@@ -26273,7 +26583,7 @@
         </p:nvSpPr>
         <p:spPr>
           <a:xfrm>
-            <a:off x="2938272" y="2258568"/>
+            <a:off x="2221992" y="2258568"/>
             <a:ext cx="1828800" cy="292608"/>
           </a:xfrm>
           <a:prstGeom prst="rect">
@@ -26307,7 +26617,7 @@
         </p:nvSpPr>
         <p:spPr>
           <a:xfrm>
-            <a:off x="2938272" y="2258568"/>
+            <a:off x="2221992" y="2258568"/>
             <a:ext cx="1828800" cy="292608"/>
           </a:xfrm>
           <a:prstGeom prst="rect">
@@ -26332,7 +26642,7 @@
                 <a:ea typeface="Trebuchet MS" pitchFamily="34" charset="-122"/>
                 <a:cs typeface="Trebuchet MS" pitchFamily="34" charset="-120"/>
               </a:rPr>
-              <a:t>auto</a:t>
+              <a:t>bio</a:t>
             </a:r>
             <a:endParaRPr lang="en-US" sz="1300" dirty="0"/>
           </a:p>
@@ -26346,7 +26656,7 @@
         </p:nvSpPr>
         <p:spPr>
           <a:xfrm>
-            <a:off x="2938272" y="2569464"/>
+            <a:off x="2221992" y="2569464"/>
             <a:ext cx="1828800" cy="201168"/>
           </a:xfrm>
           <a:prstGeom prst="rect">
@@ -26371,7 +26681,7 @@
                 <a:ea typeface="Calibri" pitchFamily="34" charset="-122"/>
                 <a:cs typeface="Calibri" pitchFamily="34" charset="-120"/>
               </a:rPr>
-              <a:t>self, own</a:t>
+              <a:t>life</a:t>
             </a:r>
             <a:endParaRPr lang="en-US" sz="850" dirty="0"/>
           </a:p>
@@ -26385,7 +26695,7 @@
         </p:nvSpPr>
         <p:spPr>
           <a:xfrm>
-            <a:off x="5803392" y="2258568"/>
+            <a:off x="4370832" y="2258568"/>
             <a:ext cx="1828800" cy="292608"/>
           </a:xfrm>
           <a:prstGeom prst="rect">
@@ -26419,7 +26729,7 @@
         </p:nvSpPr>
         <p:spPr>
           <a:xfrm>
-            <a:off x="5803392" y="2258568"/>
+            <a:off x="4370832" y="2258568"/>
             <a:ext cx="1828800" cy="292608"/>
           </a:xfrm>
           <a:prstGeom prst="rect">
@@ -26458,7 +26768,7 @@
         </p:nvSpPr>
         <p:spPr>
           <a:xfrm>
-            <a:off x="5803392" y="2569464"/>
+            <a:off x="4370832" y="2569464"/>
             <a:ext cx="1828800" cy="201168"/>
           </a:xfrm>
           <a:prstGeom prst="rect">
@@ -26483,7 +26793,7 @@
                 <a:ea typeface="Calibri" pitchFamily="34" charset="-122"/>
                 <a:cs typeface="Calibri" pitchFamily="34" charset="-120"/>
               </a:rPr>
-              <a:t>write, draw, record</a:t>
+              <a:t>write, record</a:t>
             </a:r>
             <a:endParaRPr lang="en-US" sz="850" dirty="0"/>
           </a:p>
@@ -26492,6 +26802,118 @@
       <p:sp>
         <p:nvSpPr>
           <p:cNvPr id="22" name="Shape 20"/>
+          <p:cNvSpPr/>
+          <p:nvPr/>
+        </p:nvSpPr>
+        <p:spPr>
+          <a:xfrm>
+            <a:off x="6519672" y="2258568"/>
+            <a:ext cx="1828800" cy="292608"/>
+          </a:xfrm>
+          <a:prstGeom prst="rect">
+            <a:avLst>
+              <a:gd name="adj" fmla="val 25000"/>
+            </a:avLst>
+          </a:prstGeom>
+          <a:solidFill>
+            <a:srgbClr val="FCE7F3"/>
+          </a:solidFill>
+          <a:ln w="19050">
+            <a:solidFill>
+              <a:srgbClr val="DB2777"/>
+            </a:solidFill>
+            <a:prstDash val="solid"/>
+          </a:ln>
+          <a:effectLst>
+            <a:outerShdw sx="100000" sy="100000" kx="0" ky="0" algn="bl" rotWithShape="0" blurRad="101600" dist="38100" dir="8100000">
+              <a:srgbClr val="000000">
+                <a:alpha val="12000"/>
+              </a:srgbClr>
+            </a:outerShdw>
+          </a:effectLst>
+        </p:spPr>
+      </p:sp>
+      <p:sp>
+        <p:nvSpPr>
+          <p:cNvPr id="23" name="Text 21"/>
+          <p:cNvSpPr/>
+          <p:nvPr/>
+        </p:nvSpPr>
+        <p:spPr>
+          <a:xfrm>
+            <a:off x="6519672" y="2258568"/>
+            <a:ext cx="1828800" cy="292608"/>
+          </a:xfrm>
+          <a:prstGeom prst="rect">
+            <a:avLst/>
+          </a:prstGeom>
+          <a:noFill/>
+          <a:ln/>
+        </p:spPr>
+        <p:txBody>
+          <a:bodyPr wrap="square" lIns="0" tIns="0" rIns="0" bIns="0" rtlCol="0" anchor="ctr"/>
+          <a:lstStyle/>
+          <a:p>
+            <a:pPr algn="ctr" indent="0" marL="0">
+              <a:buNone/>
+            </a:pPr>
+            <a:r>
+              <a:rPr lang="en-US" sz="1300" b="1" dirty="0">
+                <a:solidFill>
+                  <a:srgbClr val="9D174D"/>
+                </a:solidFill>
+                <a:latin typeface="Trebuchet MS" pitchFamily="34" charset="0"/>
+                <a:ea typeface="Trebuchet MS" pitchFamily="34" charset="-122"/>
+                <a:cs typeface="Trebuchet MS" pitchFamily="34" charset="-120"/>
+              </a:rPr>
+              <a:t>y</a:t>
+            </a:r>
+            <a:endParaRPr lang="en-US" sz="1300" dirty="0"/>
+          </a:p>
+        </p:txBody>
+      </p:sp>
+      <p:sp>
+        <p:nvSpPr>
+          <p:cNvPr id="24" name="Text 22"/>
+          <p:cNvSpPr/>
+          <p:nvPr/>
+        </p:nvSpPr>
+        <p:spPr>
+          <a:xfrm>
+            <a:off x="6519672" y="2569464"/>
+            <a:ext cx="1828800" cy="201168"/>
+          </a:xfrm>
+          <a:prstGeom prst="rect">
+            <a:avLst/>
+          </a:prstGeom>
+          <a:noFill/>
+          <a:ln/>
+        </p:spPr>
+        <p:txBody>
+          <a:bodyPr wrap="square" lIns="0" tIns="0" rIns="0" bIns="0" rtlCol="0" anchor="t"/>
+          <a:lstStyle/>
+          <a:p>
+            <a:pPr algn="ctr" indent="0" marL="0">
+              <a:buNone/>
+            </a:pPr>
+            <a:r>
+              <a:rPr lang="en-US" sz="850" dirty="0">
+                <a:solidFill>
+                  <a:srgbClr val="475569"/>
+                </a:solidFill>
+                <a:latin typeface="Calibri" pitchFamily="34" charset="0"/>
+                <a:ea typeface="Calibri" pitchFamily="34" charset="-122"/>
+                <a:cs typeface="Calibri" pitchFamily="34" charset="-120"/>
+              </a:rPr>
+              <a:t>state of, quality of</a:t>
+            </a:r>
+            <a:endParaRPr lang="en-US" sz="850" dirty="0"/>
+          </a:p>
+        </p:txBody>
+      </p:sp>
+      <p:sp>
+        <p:nvSpPr>
+          <p:cNvPr id="25" name="Shape 23"/>
           <p:cNvSpPr/>
           <p:nvPr/>
         </p:nvSpPr>
@@ -26518,7 +26940,7 @@
       </p:sp>
       <p:sp>
         <p:nvSpPr>
-          <p:cNvPr id="23" name="Text 21"/>
+          <p:cNvPr id="26" name="Text 24"/>
           <p:cNvSpPr/>
           <p:nvPr/>
         </p:nvSpPr>
@@ -26557,7 +26979,7 @@
       </p:sp>
       <p:sp>
         <p:nvSpPr>
-          <p:cNvPr id="24" name="Shape 22"/>
+          <p:cNvPr id="27" name="Shape 25"/>
           <p:cNvSpPr/>
           <p:nvPr/>
         </p:nvSpPr>
@@ -26584,14 +27006,14 @@
       </p:sp>
       <p:sp>
         <p:nvSpPr>
-          <p:cNvPr id="25" name="Shape 23"/>
-          <p:cNvSpPr/>
-          <p:nvPr/>
-        </p:nvSpPr>
-        <p:spPr>
-          <a:xfrm>
-            <a:off x="2313432" y="3364992"/>
-            <a:ext cx="1645920" cy="475488"/>
+          <p:cNvPr id="28" name="Shape 26"/>
+          <p:cNvSpPr/>
+          <p:nvPr/>
+        </p:nvSpPr>
+        <p:spPr>
+          <a:xfrm>
+            <a:off x="1975104" y="3364992"/>
+            <a:ext cx="1554480" cy="475488"/>
           </a:xfrm>
           <a:prstGeom prst="rect">
             <a:avLst>
@@ -26611,14 +27033,14 @@
       </p:sp>
       <p:sp>
         <p:nvSpPr>
-          <p:cNvPr id="26" name="Text 24"/>
-          <p:cNvSpPr/>
-          <p:nvPr/>
-        </p:nvSpPr>
-        <p:spPr>
-          <a:xfrm>
-            <a:off x="2313432" y="3364992"/>
-            <a:ext cx="1645920" cy="475488"/>
+          <p:cNvPr id="29" name="Text 27"/>
+          <p:cNvSpPr/>
+          <p:nvPr/>
+        </p:nvSpPr>
+        <p:spPr>
+          <a:xfrm>
+            <a:off x="1975104" y="3364992"/>
+            <a:ext cx="1554480" cy="475488"/>
           </a:xfrm>
           <a:prstGeom prst="rect">
             <a:avLst/>
@@ -26642,7 +27064,7 @@
                 <a:ea typeface="Trebuchet MS" pitchFamily="34" charset="-122"/>
                 <a:cs typeface="Trebuchet MS" pitchFamily="34" charset="-120"/>
               </a:rPr>
-              <a:t>au</a:t>
+              <a:t>bi</a:t>
             </a:r>
             <a:endParaRPr lang="en-US" sz="1400" dirty="0"/>
           </a:p>
@@ -26650,14 +27072,14 @@
       </p:sp>
       <p:sp>
         <p:nvSpPr>
-          <p:cNvPr id="27" name="Text 25"/>
-          <p:cNvSpPr/>
-          <p:nvPr/>
-        </p:nvSpPr>
-        <p:spPr>
-          <a:xfrm>
-            <a:off x="3959352" y="3364992"/>
-            <a:ext cx="411480" cy="475488"/>
+          <p:cNvPr id="30" name="Text 28"/>
+          <p:cNvSpPr/>
+          <p:nvPr/>
+        </p:nvSpPr>
+        <p:spPr>
+          <a:xfrm>
+            <a:off x="3529584" y="3364992"/>
+            <a:ext cx="73152" cy="475488"/>
           </a:xfrm>
           <a:prstGeom prst="rect">
             <a:avLst/>
@@ -26689,14 +27111,14 @@
       </p:sp>
       <p:sp>
         <p:nvSpPr>
-          <p:cNvPr id="28" name="Shape 26"/>
-          <p:cNvSpPr/>
-          <p:nvPr/>
-        </p:nvSpPr>
-        <p:spPr>
-          <a:xfrm>
-            <a:off x="4370832" y="3364992"/>
-            <a:ext cx="1645920" cy="475488"/>
+          <p:cNvPr id="31" name="Shape 29"/>
+          <p:cNvSpPr/>
+          <p:nvPr/>
+        </p:nvSpPr>
+        <p:spPr>
+          <a:xfrm>
+            <a:off x="3602736" y="3364992"/>
+            <a:ext cx="1554480" cy="475488"/>
           </a:xfrm>
           <a:prstGeom prst="rect">
             <a:avLst>
@@ -26716,14 +27138,14 @@
       </p:sp>
       <p:sp>
         <p:nvSpPr>
-          <p:cNvPr id="29" name="Text 27"/>
-          <p:cNvSpPr/>
-          <p:nvPr/>
-        </p:nvSpPr>
-        <p:spPr>
-          <a:xfrm>
-            <a:off x="4370832" y="3364992"/>
-            <a:ext cx="1645920" cy="475488"/>
+          <p:cNvPr id="32" name="Text 30"/>
+          <p:cNvSpPr/>
+          <p:nvPr/>
+        </p:nvSpPr>
+        <p:spPr>
+          <a:xfrm>
+            <a:off x="3602736" y="3364992"/>
+            <a:ext cx="1554480" cy="475488"/>
           </a:xfrm>
           <a:prstGeom prst="rect">
             <a:avLst/>
@@ -26747,7 +27169,7 @@
                 <a:ea typeface="Trebuchet MS" pitchFamily="34" charset="-122"/>
                 <a:cs typeface="Trebuchet MS" pitchFamily="34" charset="-120"/>
               </a:rPr>
-              <a:t>to</a:t>
+              <a:t>og</a:t>
             </a:r>
             <a:endParaRPr lang="en-US" sz="1400" dirty="0"/>
           </a:p>
@@ -26755,14 +27177,14 @@
       </p:sp>
       <p:sp>
         <p:nvSpPr>
-          <p:cNvPr id="30" name="Text 28"/>
-          <p:cNvSpPr/>
-          <p:nvPr/>
-        </p:nvSpPr>
-        <p:spPr>
-          <a:xfrm>
-            <a:off x="6016752" y="3364992"/>
-            <a:ext cx="411480" cy="475488"/>
+          <p:cNvPr id="33" name="Text 31"/>
+          <p:cNvSpPr/>
+          <p:nvPr/>
+        </p:nvSpPr>
+        <p:spPr>
+          <a:xfrm>
+            <a:off x="5157216" y="3364992"/>
+            <a:ext cx="73152" cy="475488"/>
           </a:xfrm>
           <a:prstGeom prst="rect">
             <a:avLst/>
@@ -26794,14 +27216,14 @@
       </p:sp>
       <p:sp>
         <p:nvSpPr>
-          <p:cNvPr id="31" name="Shape 29"/>
-          <p:cNvSpPr/>
-          <p:nvPr/>
-        </p:nvSpPr>
-        <p:spPr>
-          <a:xfrm>
-            <a:off x="6428232" y="3364992"/>
-            <a:ext cx="1645920" cy="475488"/>
+          <p:cNvPr id="34" name="Shape 32"/>
+          <p:cNvSpPr/>
+          <p:nvPr/>
+        </p:nvSpPr>
+        <p:spPr>
+          <a:xfrm>
+            <a:off x="5230368" y="3364992"/>
+            <a:ext cx="1554480" cy="475488"/>
           </a:xfrm>
           <a:prstGeom prst="rect">
             <a:avLst>
@@ -26821,14 +27243,14 @@
       </p:sp>
       <p:sp>
         <p:nvSpPr>
-          <p:cNvPr id="32" name="Text 30"/>
-          <p:cNvSpPr/>
-          <p:nvPr/>
-        </p:nvSpPr>
-        <p:spPr>
-          <a:xfrm>
-            <a:off x="6428232" y="3364992"/>
-            <a:ext cx="1645920" cy="475488"/>
+          <p:cNvPr id="35" name="Text 33"/>
+          <p:cNvSpPr/>
+          <p:nvPr/>
+        </p:nvSpPr>
+        <p:spPr>
+          <a:xfrm>
+            <a:off x="5230368" y="3364992"/>
+            <a:ext cx="1554480" cy="475488"/>
           </a:xfrm>
           <a:prstGeom prst="rect">
             <a:avLst/>
@@ -26852,7 +27274,7 @@
                 <a:ea typeface="Trebuchet MS" pitchFamily="34" charset="-122"/>
                 <a:cs typeface="Trebuchet MS" pitchFamily="34" charset="-120"/>
               </a:rPr>
-              <a:t>graph</a:t>
+              <a:t>ra</a:t>
             </a:r>
             <a:endParaRPr lang="en-US" sz="1400" dirty="0"/>
           </a:p>
@@ -26860,7 +27282,112 @@
       </p:sp>
       <p:sp>
         <p:nvSpPr>
-          <p:cNvPr id="33" name="Shape 31"/>
+          <p:cNvPr id="36" name="Text 34"/>
+          <p:cNvSpPr/>
+          <p:nvPr/>
+        </p:nvSpPr>
+        <p:spPr>
+          <a:xfrm>
+            <a:off x="6784848" y="3364992"/>
+            <a:ext cx="73152" cy="475488"/>
+          </a:xfrm>
+          <a:prstGeom prst="rect">
+            <a:avLst/>
+          </a:prstGeom>
+          <a:noFill/>
+          <a:ln/>
+        </p:spPr>
+        <p:txBody>
+          <a:bodyPr wrap="square" lIns="0" tIns="0" rIns="0" bIns="0" rtlCol="0" anchor="ctr"/>
+          <a:lstStyle/>
+          <a:p>
+            <a:pPr algn="ctr" indent="0" marL="0">
+              <a:buNone/>
+            </a:pPr>
+            <a:r>
+              <a:rPr lang="en-US" sz="1600" b="1" dirty="0">
+                <a:solidFill>
+                  <a:srgbClr val="0D9488"/>
+                </a:solidFill>
+                <a:latin typeface="Trebuchet MS" pitchFamily="34" charset="0"/>
+                <a:ea typeface="Trebuchet MS" pitchFamily="34" charset="-122"/>
+                <a:cs typeface="Trebuchet MS" pitchFamily="34" charset="-120"/>
+              </a:rPr>
+              <a:t>·</a:t>
+            </a:r>
+            <a:endParaRPr lang="en-US" sz="1600" dirty="0"/>
+          </a:p>
+        </p:txBody>
+      </p:sp>
+      <p:sp>
+        <p:nvSpPr>
+          <p:cNvPr id="37" name="Shape 35"/>
+          <p:cNvSpPr/>
+          <p:nvPr/>
+        </p:nvSpPr>
+        <p:spPr>
+          <a:xfrm>
+            <a:off x="6858000" y="3364992"/>
+            <a:ext cx="1554480" cy="475488"/>
+          </a:xfrm>
+          <a:prstGeom prst="rect">
+            <a:avLst>
+              <a:gd name="adj" fmla="val 9615"/>
+            </a:avLst>
+          </a:prstGeom>
+          <a:solidFill>
+            <a:srgbClr val="FFFFFF"/>
+          </a:solidFill>
+          <a:ln w="12700">
+            <a:solidFill>
+              <a:srgbClr val="0D9488"/>
+            </a:solidFill>
+            <a:prstDash val="solid"/>
+          </a:ln>
+        </p:spPr>
+      </p:sp>
+      <p:sp>
+        <p:nvSpPr>
+          <p:cNvPr id="38" name="Text 36"/>
+          <p:cNvSpPr/>
+          <p:nvPr/>
+        </p:nvSpPr>
+        <p:spPr>
+          <a:xfrm>
+            <a:off x="6858000" y="3364992"/>
+            <a:ext cx="1554480" cy="475488"/>
+          </a:xfrm>
+          <a:prstGeom prst="rect">
+            <a:avLst/>
+          </a:prstGeom>
+          <a:noFill/>
+          <a:ln/>
+        </p:spPr>
+        <p:txBody>
+          <a:bodyPr wrap="square" lIns="0" tIns="0" rIns="0" bIns="0" rtlCol="0" anchor="ctr"/>
+          <a:lstStyle/>
+          <a:p>
+            <a:pPr algn="ctr" indent="0" marL="0">
+              <a:buNone/>
+            </a:pPr>
+            <a:r>
+              <a:rPr lang="en-US" sz="1400" b="1" dirty="0">
+                <a:solidFill>
+                  <a:srgbClr val="0D9488"/>
+                </a:solidFill>
+                <a:latin typeface="Trebuchet MS" pitchFamily="34" charset="0"/>
+                <a:ea typeface="Trebuchet MS" pitchFamily="34" charset="-122"/>
+                <a:cs typeface="Trebuchet MS" pitchFamily="34" charset="-120"/>
+              </a:rPr>
+              <a:t>phy</a:t>
+            </a:r>
+            <a:endParaRPr lang="en-US" sz="1400" dirty="0"/>
+          </a:p>
+        </p:txBody>
+      </p:sp>
+      <p:sp>
+        <p:nvSpPr>
+          <p:cNvPr id="39" name="Shape 37"/>
           <p:cNvSpPr/>
           <p:nvPr/>
         </p:nvSpPr>
@@ -26887,7 +27414,7 @@
       </p:sp>
       <p:sp>
         <p:nvSpPr>
-          <p:cNvPr id="34" name="Text 32"/>
+          <p:cNvPr id="40" name="Text 38"/>
           <p:cNvSpPr/>
           <p:nvPr/>
         </p:nvSpPr>
@@ -26926,7 +27453,7 @@
       </p:sp>
       <p:sp>
         <p:nvSpPr>
-          <p:cNvPr id="35" name="Shape 33"/>
+          <p:cNvPr id="41" name="Shape 39"/>
           <p:cNvSpPr/>
           <p:nvPr/>
         </p:nvSpPr>
@@ -26953,7 +27480,7 @@
       </p:sp>
       <p:sp>
         <p:nvSpPr>
-          <p:cNvPr id="36" name="Text 34"/>
+          <p:cNvPr id="42" name="Text 40"/>
           <p:cNvSpPr/>
           <p:nvPr/>
         </p:nvSpPr>
@@ -27415,7 +27942,7 @@
                 <a:ea typeface="Trebuchet MS" pitchFamily="34" charset="-122"/>
                 <a:cs typeface="Trebuchet MS" pitchFamily="34" charset="-120"/>
               </a:rPr>
-              <a:t>autograph</a:t>
+              <a:t>biography</a:t>
             </a:r>
             <a:endParaRPr lang="en-US" sz="2800" dirty="0"/>
           </a:p>
@@ -27495,7 +28022,7 @@
         </p:nvSpPr>
         <p:spPr>
           <a:xfrm>
-            <a:off x="2938272" y="2258568"/>
+            <a:off x="2221992" y="2258568"/>
             <a:ext cx="1828800" cy="292608"/>
           </a:xfrm>
           <a:prstGeom prst="rect">
@@ -27529,7 +28056,7 @@
         </p:nvSpPr>
         <p:spPr>
           <a:xfrm>
-            <a:off x="2938272" y="2258568"/>
+            <a:off x="2221992" y="2258568"/>
             <a:ext cx="1828800" cy="292608"/>
           </a:xfrm>
           <a:prstGeom prst="rect">
@@ -27554,7 +28081,7 @@
                 <a:ea typeface="Trebuchet MS" pitchFamily="34" charset="-122"/>
                 <a:cs typeface="Trebuchet MS" pitchFamily="34" charset="-120"/>
               </a:rPr>
-              <a:t>auto</a:t>
+              <a:t>bio</a:t>
             </a:r>
             <a:endParaRPr lang="en-US" sz="1300" dirty="0"/>
           </a:p>
@@ -27568,7 +28095,7 @@
         </p:nvSpPr>
         <p:spPr>
           <a:xfrm>
-            <a:off x="2938272" y="2569464"/>
+            <a:off x="2221992" y="2569464"/>
             <a:ext cx="1828800" cy="201168"/>
           </a:xfrm>
           <a:prstGeom prst="rect">
@@ -27593,7 +28120,7 @@
                 <a:ea typeface="Calibri" pitchFamily="34" charset="-122"/>
                 <a:cs typeface="Calibri" pitchFamily="34" charset="-120"/>
               </a:rPr>
-              <a:t>self, own</a:t>
+              <a:t>life</a:t>
             </a:r>
             <a:endParaRPr lang="en-US" sz="850" dirty="0"/>
           </a:p>
@@ -27607,7 +28134,7 @@
         </p:nvSpPr>
         <p:spPr>
           <a:xfrm>
-            <a:off x="5803392" y="2258568"/>
+            <a:off x="4370832" y="2258568"/>
             <a:ext cx="1828800" cy="292608"/>
           </a:xfrm>
           <a:prstGeom prst="rect">
@@ -27641,7 +28168,7 @@
         </p:nvSpPr>
         <p:spPr>
           <a:xfrm>
-            <a:off x="5803392" y="2258568"/>
+            <a:off x="4370832" y="2258568"/>
             <a:ext cx="1828800" cy="292608"/>
           </a:xfrm>
           <a:prstGeom prst="rect">
@@ -27680,7 +28207,7 @@
         </p:nvSpPr>
         <p:spPr>
           <a:xfrm>
-            <a:off x="5803392" y="2569464"/>
+            <a:off x="4370832" y="2569464"/>
             <a:ext cx="1828800" cy="201168"/>
           </a:xfrm>
           <a:prstGeom prst="rect">
@@ -27705,7 +28232,7 @@
                 <a:ea typeface="Calibri" pitchFamily="34" charset="-122"/>
                 <a:cs typeface="Calibri" pitchFamily="34" charset="-120"/>
               </a:rPr>
-              <a:t>write, draw, record</a:t>
+              <a:t>write, record</a:t>
             </a:r>
             <a:endParaRPr lang="en-US" sz="850" dirty="0"/>
           </a:p>
@@ -27714,6 +28241,118 @@
       <p:sp>
         <p:nvSpPr>
           <p:cNvPr id="22" name="Shape 20"/>
+          <p:cNvSpPr/>
+          <p:nvPr/>
+        </p:nvSpPr>
+        <p:spPr>
+          <a:xfrm>
+            <a:off x="6519672" y="2258568"/>
+            <a:ext cx="1828800" cy="292608"/>
+          </a:xfrm>
+          <a:prstGeom prst="rect">
+            <a:avLst>
+              <a:gd name="adj" fmla="val 25000"/>
+            </a:avLst>
+          </a:prstGeom>
+          <a:solidFill>
+            <a:srgbClr val="FCE7F3"/>
+          </a:solidFill>
+          <a:ln w="19050">
+            <a:solidFill>
+              <a:srgbClr val="DB2777"/>
+            </a:solidFill>
+            <a:prstDash val="solid"/>
+          </a:ln>
+          <a:effectLst>
+            <a:outerShdw sx="100000" sy="100000" kx="0" ky="0" algn="bl" rotWithShape="0" blurRad="101600" dist="38100" dir="8100000">
+              <a:srgbClr val="000000">
+                <a:alpha val="12000"/>
+              </a:srgbClr>
+            </a:outerShdw>
+          </a:effectLst>
+        </p:spPr>
+      </p:sp>
+      <p:sp>
+        <p:nvSpPr>
+          <p:cNvPr id="23" name="Text 21"/>
+          <p:cNvSpPr/>
+          <p:nvPr/>
+        </p:nvSpPr>
+        <p:spPr>
+          <a:xfrm>
+            <a:off x="6519672" y="2258568"/>
+            <a:ext cx="1828800" cy="292608"/>
+          </a:xfrm>
+          <a:prstGeom prst="rect">
+            <a:avLst/>
+          </a:prstGeom>
+          <a:noFill/>
+          <a:ln/>
+        </p:spPr>
+        <p:txBody>
+          <a:bodyPr wrap="square" lIns="0" tIns="0" rIns="0" bIns="0" rtlCol="0" anchor="ctr"/>
+          <a:lstStyle/>
+          <a:p>
+            <a:pPr algn="ctr" indent="0" marL="0">
+              <a:buNone/>
+            </a:pPr>
+            <a:r>
+              <a:rPr lang="en-US" sz="1300" b="1" dirty="0">
+                <a:solidFill>
+                  <a:srgbClr val="9D174D"/>
+                </a:solidFill>
+                <a:latin typeface="Trebuchet MS" pitchFamily="34" charset="0"/>
+                <a:ea typeface="Trebuchet MS" pitchFamily="34" charset="-122"/>
+                <a:cs typeface="Trebuchet MS" pitchFamily="34" charset="-120"/>
+              </a:rPr>
+              <a:t>y</a:t>
+            </a:r>
+            <a:endParaRPr lang="en-US" sz="1300" dirty="0"/>
+          </a:p>
+        </p:txBody>
+      </p:sp>
+      <p:sp>
+        <p:nvSpPr>
+          <p:cNvPr id="24" name="Text 22"/>
+          <p:cNvSpPr/>
+          <p:nvPr/>
+        </p:nvSpPr>
+        <p:spPr>
+          <a:xfrm>
+            <a:off x="6519672" y="2569464"/>
+            <a:ext cx="1828800" cy="201168"/>
+          </a:xfrm>
+          <a:prstGeom prst="rect">
+            <a:avLst/>
+          </a:prstGeom>
+          <a:noFill/>
+          <a:ln/>
+        </p:spPr>
+        <p:txBody>
+          <a:bodyPr wrap="square" lIns="0" tIns="0" rIns="0" bIns="0" rtlCol="0" anchor="t"/>
+          <a:lstStyle/>
+          <a:p>
+            <a:pPr algn="ctr" indent="0" marL="0">
+              <a:buNone/>
+            </a:pPr>
+            <a:r>
+              <a:rPr lang="en-US" sz="850" dirty="0">
+                <a:solidFill>
+                  <a:srgbClr val="475569"/>
+                </a:solidFill>
+                <a:latin typeface="Calibri" pitchFamily="34" charset="0"/>
+                <a:ea typeface="Calibri" pitchFamily="34" charset="-122"/>
+                <a:cs typeface="Calibri" pitchFamily="34" charset="-120"/>
+              </a:rPr>
+              <a:t>state of, quality of</a:t>
+            </a:r>
+            <a:endParaRPr lang="en-US" sz="850" dirty="0"/>
+          </a:p>
+        </p:txBody>
+      </p:sp>
+      <p:sp>
+        <p:nvSpPr>
+          <p:cNvPr id="25" name="Shape 23"/>
           <p:cNvSpPr/>
           <p:nvPr/>
         </p:nvSpPr>
@@ -27740,7 +28379,7 @@
       </p:sp>
       <p:sp>
         <p:nvSpPr>
-          <p:cNvPr id="23" name="Text 21"/>
+          <p:cNvPr id="26" name="Text 24"/>
           <p:cNvSpPr/>
           <p:nvPr/>
         </p:nvSpPr>
@@ -27779,7 +28418,7 @@
       </p:sp>
       <p:sp>
         <p:nvSpPr>
-          <p:cNvPr id="24" name="Shape 22"/>
+          <p:cNvPr id="27" name="Shape 25"/>
           <p:cNvSpPr/>
           <p:nvPr/>
         </p:nvSpPr>
@@ -27806,14 +28445,14 @@
       </p:sp>
       <p:sp>
         <p:nvSpPr>
-          <p:cNvPr id="25" name="Shape 23"/>
-          <p:cNvSpPr/>
-          <p:nvPr/>
-        </p:nvSpPr>
-        <p:spPr>
-          <a:xfrm>
-            <a:off x="2313432" y="3364992"/>
-            <a:ext cx="1645920" cy="475488"/>
+          <p:cNvPr id="28" name="Shape 26"/>
+          <p:cNvSpPr/>
+          <p:nvPr/>
+        </p:nvSpPr>
+        <p:spPr>
+          <a:xfrm>
+            <a:off x="1975104" y="3364992"/>
+            <a:ext cx="1554480" cy="475488"/>
           </a:xfrm>
           <a:prstGeom prst="rect">
             <a:avLst>
@@ -27833,14 +28472,14 @@
       </p:sp>
       <p:sp>
         <p:nvSpPr>
-          <p:cNvPr id="26" name="Text 24"/>
-          <p:cNvSpPr/>
-          <p:nvPr/>
-        </p:nvSpPr>
-        <p:spPr>
-          <a:xfrm>
-            <a:off x="2313432" y="3364992"/>
-            <a:ext cx="1645920" cy="475488"/>
+          <p:cNvPr id="29" name="Text 27"/>
+          <p:cNvSpPr/>
+          <p:nvPr/>
+        </p:nvSpPr>
+        <p:spPr>
+          <a:xfrm>
+            <a:off x="1975104" y="3364992"/>
+            <a:ext cx="1554480" cy="475488"/>
           </a:xfrm>
           <a:prstGeom prst="rect">
             <a:avLst/>
@@ -27864,7 +28503,7 @@
                 <a:ea typeface="Trebuchet MS" pitchFamily="34" charset="-122"/>
                 <a:cs typeface="Trebuchet MS" pitchFamily="34" charset="-120"/>
               </a:rPr>
-              <a:t>au</a:t>
+              <a:t>bi</a:t>
             </a:r>
             <a:endParaRPr lang="en-US" sz="1400" dirty="0"/>
           </a:p>
@@ -27872,14 +28511,14 @@
       </p:sp>
       <p:sp>
         <p:nvSpPr>
-          <p:cNvPr id="27" name="Text 25"/>
-          <p:cNvSpPr/>
-          <p:nvPr/>
-        </p:nvSpPr>
-        <p:spPr>
-          <a:xfrm>
-            <a:off x="3959352" y="3364992"/>
-            <a:ext cx="411480" cy="475488"/>
+          <p:cNvPr id="30" name="Text 28"/>
+          <p:cNvSpPr/>
+          <p:nvPr/>
+        </p:nvSpPr>
+        <p:spPr>
+          <a:xfrm>
+            <a:off x="3529584" y="3364992"/>
+            <a:ext cx="73152" cy="475488"/>
           </a:xfrm>
           <a:prstGeom prst="rect">
             <a:avLst/>
@@ -27911,14 +28550,14 @@
       </p:sp>
       <p:sp>
         <p:nvSpPr>
-          <p:cNvPr id="28" name="Shape 26"/>
-          <p:cNvSpPr/>
-          <p:nvPr/>
-        </p:nvSpPr>
-        <p:spPr>
-          <a:xfrm>
-            <a:off x="4370832" y="3364992"/>
-            <a:ext cx="1645920" cy="475488"/>
+          <p:cNvPr id="31" name="Shape 29"/>
+          <p:cNvSpPr/>
+          <p:nvPr/>
+        </p:nvSpPr>
+        <p:spPr>
+          <a:xfrm>
+            <a:off x="3602736" y="3364992"/>
+            <a:ext cx="1554480" cy="475488"/>
           </a:xfrm>
           <a:prstGeom prst="rect">
             <a:avLst>
@@ -27938,14 +28577,14 @@
       </p:sp>
       <p:sp>
         <p:nvSpPr>
-          <p:cNvPr id="29" name="Text 27"/>
-          <p:cNvSpPr/>
-          <p:nvPr/>
-        </p:nvSpPr>
-        <p:spPr>
-          <a:xfrm>
-            <a:off x="4370832" y="3364992"/>
-            <a:ext cx="1645920" cy="475488"/>
+          <p:cNvPr id="32" name="Text 30"/>
+          <p:cNvSpPr/>
+          <p:nvPr/>
+        </p:nvSpPr>
+        <p:spPr>
+          <a:xfrm>
+            <a:off x="3602736" y="3364992"/>
+            <a:ext cx="1554480" cy="475488"/>
           </a:xfrm>
           <a:prstGeom prst="rect">
             <a:avLst/>
@@ -27969,7 +28608,7 @@
                 <a:ea typeface="Trebuchet MS" pitchFamily="34" charset="-122"/>
                 <a:cs typeface="Trebuchet MS" pitchFamily="34" charset="-120"/>
               </a:rPr>
-              <a:t>to</a:t>
+              <a:t>og</a:t>
             </a:r>
             <a:endParaRPr lang="en-US" sz="1400" dirty="0"/>
           </a:p>
@@ -27977,14 +28616,14 @@
       </p:sp>
       <p:sp>
         <p:nvSpPr>
-          <p:cNvPr id="30" name="Text 28"/>
-          <p:cNvSpPr/>
-          <p:nvPr/>
-        </p:nvSpPr>
-        <p:spPr>
-          <a:xfrm>
-            <a:off x="6016752" y="3364992"/>
-            <a:ext cx="411480" cy="475488"/>
+          <p:cNvPr id="33" name="Text 31"/>
+          <p:cNvSpPr/>
+          <p:nvPr/>
+        </p:nvSpPr>
+        <p:spPr>
+          <a:xfrm>
+            <a:off x="5157216" y="3364992"/>
+            <a:ext cx="73152" cy="475488"/>
           </a:xfrm>
           <a:prstGeom prst="rect">
             <a:avLst/>
@@ -28016,14 +28655,14 @@
       </p:sp>
       <p:sp>
         <p:nvSpPr>
-          <p:cNvPr id="31" name="Shape 29"/>
-          <p:cNvSpPr/>
-          <p:nvPr/>
-        </p:nvSpPr>
-        <p:spPr>
-          <a:xfrm>
-            <a:off x="6428232" y="3364992"/>
-            <a:ext cx="1645920" cy="475488"/>
+          <p:cNvPr id="34" name="Shape 32"/>
+          <p:cNvSpPr/>
+          <p:nvPr/>
+        </p:nvSpPr>
+        <p:spPr>
+          <a:xfrm>
+            <a:off x="5230368" y="3364992"/>
+            <a:ext cx="1554480" cy="475488"/>
           </a:xfrm>
           <a:prstGeom prst="rect">
             <a:avLst>
@@ -28043,14 +28682,14 @@
       </p:sp>
       <p:sp>
         <p:nvSpPr>
-          <p:cNvPr id="32" name="Text 30"/>
-          <p:cNvSpPr/>
-          <p:nvPr/>
-        </p:nvSpPr>
-        <p:spPr>
-          <a:xfrm>
-            <a:off x="6428232" y="3364992"/>
-            <a:ext cx="1645920" cy="475488"/>
+          <p:cNvPr id="35" name="Text 33"/>
+          <p:cNvSpPr/>
+          <p:nvPr/>
+        </p:nvSpPr>
+        <p:spPr>
+          <a:xfrm>
+            <a:off x="5230368" y="3364992"/>
+            <a:ext cx="1554480" cy="475488"/>
           </a:xfrm>
           <a:prstGeom prst="rect">
             <a:avLst/>
@@ -28074,7 +28713,7 @@
                 <a:ea typeface="Trebuchet MS" pitchFamily="34" charset="-122"/>
                 <a:cs typeface="Trebuchet MS" pitchFamily="34" charset="-120"/>
               </a:rPr>
-              <a:t>graph</a:t>
+              <a:t>ra</a:t>
             </a:r>
             <a:endParaRPr lang="en-US" sz="1400" dirty="0"/>
           </a:p>
@@ -28082,7 +28721,112 @@
       </p:sp>
       <p:sp>
         <p:nvSpPr>
-          <p:cNvPr id="33" name="Shape 31"/>
+          <p:cNvPr id="36" name="Text 34"/>
+          <p:cNvSpPr/>
+          <p:nvPr/>
+        </p:nvSpPr>
+        <p:spPr>
+          <a:xfrm>
+            <a:off x="6784848" y="3364992"/>
+            <a:ext cx="73152" cy="475488"/>
+          </a:xfrm>
+          <a:prstGeom prst="rect">
+            <a:avLst/>
+          </a:prstGeom>
+          <a:noFill/>
+          <a:ln/>
+        </p:spPr>
+        <p:txBody>
+          <a:bodyPr wrap="square" lIns="0" tIns="0" rIns="0" bIns="0" rtlCol="0" anchor="ctr"/>
+          <a:lstStyle/>
+          <a:p>
+            <a:pPr algn="ctr" indent="0" marL="0">
+              <a:buNone/>
+            </a:pPr>
+            <a:r>
+              <a:rPr lang="en-US" sz="1600" b="1" dirty="0">
+                <a:solidFill>
+                  <a:srgbClr val="0D9488"/>
+                </a:solidFill>
+                <a:latin typeface="Trebuchet MS" pitchFamily="34" charset="0"/>
+                <a:ea typeface="Trebuchet MS" pitchFamily="34" charset="-122"/>
+                <a:cs typeface="Trebuchet MS" pitchFamily="34" charset="-120"/>
+              </a:rPr>
+              <a:t>·</a:t>
+            </a:r>
+            <a:endParaRPr lang="en-US" sz="1600" dirty="0"/>
+          </a:p>
+        </p:txBody>
+      </p:sp>
+      <p:sp>
+        <p:nvSpPr>
+          <p:cNvPr id="37" name="Shape 35"/>
+          <p:cNvSpPr/>
+          <p:nvPr/>
+        </p:nvSpPr>
+        <p:spPr>
+          <a:xfrm>
+            <a:off x="6858000" y="3364992"/>
+            <a:ext cx="1554480" cy="475488"/>
+          </a:xfrm>
+          <a:prstGeom prst="rect">
+            <a:avLst>
+              <a:gd name="adj" fmla="val 9615"/>
+            </a:avLst>
+          </a:prstGeom>
+          <a:solidFill>
+            <a:srgbClr val="FFFFFF"/>
+          </a:solidFill>
+          <a:ln w="12700">
+            <a:solidFill>
+              <a:srgbClr val="0D9488"/>
+            </a:solidFill>
+            <a:prstDash val="solid"/>
+          </a:ln>
+        </p:spPr>
+      </p:sp>
+      <p:sp>
+        <p:nvSpPr>
+          <p:cNvPr id="38" name="Text 36"/>
+          <p:cNvSpPr/>
+          <p:nvPr/>
+        </p:nvSpPr>
+        <p:spPr>
+          <a:xfrm>
+            <a:off x="6858000" y="3364992"/>
+            <a:ext cx="1554480" cy="475488"/>
+          </a:xfrm>
+          <a:prstGeom prst="rect">
+            <a:avLst/>
+          </a:prstGeom>
+          <a:noFill/>
+          <a:ln/>
+        </p:spPr>
+        <p:txBody>
+          <a:bodyPr wrap="square" lIns="0" tIns="0" rIns="0" bIns="0" rtlCol="0" anchor="ctr"/>
+          <a:lstStyle/>
+          <a:p>
+            <a:pPr algn="ctr" indent="0" marL="0">
+              <a:buNone/>
+            </a:pPr>
+            <a:r>
+              <a:rPr lang="en-US" sz="1400" b="1" dirty="0">
+                <a:solidFill>
+                  <a:srgbClr val="0D9488"/>
+                </a:solidFill>
+                <a:latin typeface="Trebuchet MS" pitchFamily="34" charset="0"/>
+                <a:ea typeface="Trebuchet MS" pitchFamily="34" charset="-122"/>
+                <a:cs typeface="Trebuchet MS" pitchFamily="34" charset="-120"/>
+              </a:rPr>
+              <a:t>phy</a:t>
+            </a:r>
+            <a:endParaRPr lang="en-US" sz="1400" dirty="0"/>
+          </a:p>
+        </p:txBody>
+      </p:sp>
+      <p:sp>
+        <p:nvSpPr>
+          <p:cNvPr id="39" name="Shape 37"/>
           <p:cNvSpPr/>
           <p:nvPr/>
         </p:nvSpPr>
@@ -28109,7 +28853,7 @@
       </p:sp>
       <p:sp>
         <p:nvSpPr>
-          <p:cNvPr id="34" name="Text 32"/>
+          <p:cNvPr id="40" name="Text 38"/>
           <p:cNvSpPr/>
           <p:nvPr/>
         </p:nvSpPr>
@@ -28148,7 +28892,7 @@
       </p:sp>
       <p:sp>
         <p:nvSpPr>
-          <p:cNvPr id="35" name="Shape 33"/>
+          <p:cNvPr id="41" name="Shape 39"/>
           <p:cNvSpPr/>
           <p:nvPr/>
         </p:nvSpPr>
@@ -28175,13 +28919,13 @@
       </p:sp>
       <p:sp>
         <p:nvSpPr>
-          <p:cNvPr id="36" name="Shape 34"/>
-          <p:cNvSpPr/>
-          <p:nvPr/>
-        </p:nvSpPr>
-        <p:spPr>
-          <a:xfrm>
-            <a:off x="2254649" y="4169664"/>
+          <p:cNvPr id="42" name="Shape 40"/>
+          <p:cNvSpPr/>
+          <p:nvPr/>
+        </p:nvSpPr>
+        <p:spPr>
+          <a:xfrm>
+            <a:off x="2023872" y="4169664"/>
             <a:ext cx="685800" cy="384048"/>
           </a:xfrm>
           <a:prstGeom prst="rect">
@@ -28202,13 +28946,13 @@
       </p:sp>
       <p:sp>
         <p:nvSpPr>
-          <p:cNvPr id="37" name="Text 35"/>
-          <p:cNvSpPr/>
-          <p:nvPr/>
-        </p:nvSpPr>
-        <p:spPr>
-          <a:xfrm>
-            <a:off x="2254649" y="4169664"/>
+          <p:cNvPr id="43" name="Text 41"/>
+          <p:cNvSpPr/>
+          <p:nvPr/>
+        </p:nvSpPr>
+        <p:spPr>
+          <a:xfrm>
+            <a:off x="2023872" y="4169664"/>
             <a:ext cx="685800" cy="384048"/>
           </a:xfrm>
           <a:prstGeom prst="rect">
@@ -28233,7 +28977,7 @@
                 <a:ea typeface="Trebuchet MS" pitchFamily="34" charset="-122"/>
                 <a:cs typeface="Trebuchet MS" pitchFamily="34" charset="-120"/>
               </a:rPr>
-              <a:t>au</a:t>
+              <a:t>b</a:t>
             </a:r>
             <a:endParaRPr lang="en-US" sz="900" dirty="0"/>
           </a:p>
@@ -28241,13 +28985,13 @@
       </p:sp>
       <p:sp>
         <p:nvSpPr>
-          <p:cNvPr id="38" name="Shape 36"/>
-          <p:cNvSpPr/>
-          <p:nvPr/>
-        </p:nvSpPr>
-        <p:spPr>
-          <a:xfrm>
-            <a:off x="3293146" y="4169664"/>
+          <p:cNvPr id="44" name="Shape 42"/>
+          <p:cNvSpPr/>
+          <p:nvPr/>
+        </p:nvSpPr>
+        <p:spPr>
+          <a:xfrm>
+            <a:off x="2831592" y="4169664"/>
             <a:ext cx="685800" cy="384048"/>
           </a:xfrm>
           <a:prstGeom prst="rect">
@@ -28268,13 +29012,13 @@
       </p:sp>
       <p:sp>
         <p:nvSpPr>
-          <p:cNvPr id="39" name="Text 37"/>
-          <p:cNvSpPr/>
-          <p:nvPr/>
-        </p:nvSpPr>
-        <p:spPr>
-          <a:xfrm>
-            <a:off x="3293146" y="4169664"/>
+          <p:cNvPr id="45" name="Text 43"/>
+          <p:cNvSpPr/>
+          <p:nvPr/>
+        </p:nvSpPr>
+        <p:spPr>
+          <a:xfrm>
+            <a:off x="2831592" y="4169664"/>
             <a:ext cx="685800" cy="384048"/>
           </a:xfrm>
           <a:prstGeom prst="rect">
@@ -28299,7 +29043,7 @@
                 <a:ea typeface="Trebuchet MS" pitchFamily="34" charset="-122"/>
                 <a:cs typeface="Trebuchet MS" pitchFamily="34" charset="-120"/>
               </a:rPr>
-              <a:t>t</a:t>
+              <a:t>i</a:t>
             </a:r>
             <a:endParaRPr lang="en-US" sz="900" dirty="0"/>
           </a:p>
@@ -28307,13 +29051,13 @@
       </p:sp>
       <p:sp>
         <p:nvSpPr>
-          <p:cNvPr id="40" name="Shape 38"/>
-          <p:cNvSpPr/>
-          <p:nvPr/>
-        </p:nvSpPr>
-        <p:spPr>
-          <a:xfrm>
-            <a:off x="4331643" y="4169664"/>
+          <p:cNvPr id="46" name="Shape 44"/>
+          <p:cNvSpPr/>
+          <p:nvPr/>
+        </p:nvSpPr>
+        <p:spPr>
+          <a:xfrm>
+            <a:off x="3639312" y="4169664"/>
             <a:ext cx="685800" cy="384048"/>
           </a:xfrm>
           <a:prstGeom prst="rect">
@@ -28334,13 +29078,13 @@
       </p:sp>
       <p:sp>
         <p:nvSpPr>
-          <p:cNvPr id="41" name="Text 39"/>
-          <p:cNvSpPr/>
-          <p:nvPr/>
-        </p:nvSpPr>
-        <p:spPr>
-          <a:xfrm>
-            <a:off x="4331643" y="4169664"/>
+          <p:cNvPr id="47" name="Text 45"/>
+          <p:cNvSpPr/>
+          <p:nvPr/>
+        </p:nvSpPr>
+        <p:spPr>
+          <a:xfrm>
+            <a:off x="3639312" y="4169664"/>
             <a:ext cx="685800" cy="384048"/>
           </a:xfrm>
           <a:prstGeom prst="rect">
@@ -28373,13 +29117,13 @@
       </p:sp>
       <p:sp>
         <p:nvSpPr>
-          <p:cNvPr id="42" name="Shape 40"/>
-          <p:cNvSpPr/>
-          <p:nvPr/>
-        </p:nvSpPr>
-        <p:spPr>
-          <a:xfrm>
-            <a:off x="5370141" y="4169664"/>
+          <p:cNvPr id="48" name="Shape 46"/>
+          <p:cNvSpPr/>
+          <p:nvPr/>
+        </p:nvSpPr>
+        <p:spPr>
+          <a:xfrm>
+            <a:off x="4447032" y="4169664"/>
             <a:ext cx="685800" cy="384048"/>
           </a:xfrm>
           <a:prstGeom prst="rect">
@@ -28400,13 +29144,13 @@
       </p:sp>
       <p:sp>
         <p:nvSpPr>
-          <p:cNvPr id="43" name="Text 41"/>
-          <p:cNvSpPr/>
-          <p:nvPr/>
-        </p:nvSpPr>
-        <p:spPr>
-          <a:xfrm>
-            <a:off x="5370141" y="4169664"/>
+          <p:cNvPr id="49" name="Text 47"/>
+          <p:cNvSpPr/>
+          <p:nvPr/>
+        </p:nvSpPr>
+        <p:spPr>
+          <a:xfrm>
+            <a:off x="4447032" y="4169664"/>
             <a:ext cx="685800" cy="384048"/>
           </a:xfrm>
           <a:prstGeom prst="rect">
@@ -28431,7 +29175,7 @@
                 <a:ea typeface="Trebuchet MS" pitchFamily="34" charset="-122"/>
                 <a:cs typeface="Trebuchet MS" pitchFamily="34" charset="-120"/>
               </a:rPr>
-              <a:t>gr</a:t>
+              <a:t>g</a:t>
             </a:r>
             <a:endParaRPr lang="en-US" sz="900" dirty="0"/>
           </a:p>
@@ -28439,13 +29183,13 @@
       </p:sp>
       <p:sp>
         <p:nvSpPr>
-          <p:cNvPr id="44" name="Shape 42"/>
-          <p:cNvSpPr/>
-          <p:nvPr/>
-        </p:nvSpPr>
-        <p:spPr>
-          <a:xfrm>
-            <a:off x="6408638" y="4169664"/>
+          <p:cNvPr id="50" name="Shape 48"/>
+          <p:cNvSpPr/>
+          <p:nvPr/>
+        </p:nvSpPr>
+        <p:spPr>
+          <a:xfrm>
+            <a:off x="5254752" y="4169664"/>
             <a:ext cx="685800" cy="384048"/>
           </a:xfrm>
           <a:prstGeom prst="rect">
@@ -28466,13 +29210,13 @@
       </p:sp>
       <p:sp>
         <p:nvSpPr>
-          <p:cNvPr id="45" name="Text 43"/>
-          <p:cNvSpPr/>
-          <p:nvPr/>
-        </p:nvSpPr>
-        <p:spPr>
-          <a:xfrm>
-            <a:off x="6408638" y="4169664"/>
+          <p:cNvPr id="51" name="Text 49"/>
+          <p:cNvSpPr/>
+          <p:nvPr/>
+        </p:nvSpPr>
+        <p:spPr>
+          <a:xfrm>
+            <a:off x="5254752" y="4169664"/>
             <a:ext cx="685800" cy="384048"/>
           </a:xfrm>
           <a:prstGeom prst="rect">
@@ -28497,7 +29241,7 @@
                 <a:ea typeface="Trebuchet MS" pitchFamily="34" charset="-122"/>
                 <a:cs typeface="Trebuchet MS" pitchFamily="34" charset="-120"/>
               </a:rPr>
-              <a:t>a</a:t>
+              <a:t>r</a:t>
             </a:r>
             <a:endParaRPr lang="en-US" sz="900" dirty="0"/>
           </a:p>
@@ -28505,13 +29249,13 @@
       </p:sp>
       <p:sp>
         <p:nvSpPr>
-          <p:cNvPr id="46" name="Shape 44"/>
-          <p:cNvSpPr/>
-          <p:nvPr/>
-        </p:nvSpPr>
-        <p:spPr>
-          <a:xfrm>
-            <a:off x="7447135" y="4169664"/>
+          <p:cNvPr id="52" name="Shape 50"/>
+          <p:cNvSpPr/>
+          <p:nvPr/>
+        </p:nvSpPr>
+        <p:spPr>
+          <a:xfrm>
+            <a:off x="6062472" y="4169664"/>
             <a:ext cx="685800" cy="384048"/>
           </a:xfrm>
           <a:prstGeom prst="rect">
@@ -28532,13 +29276,13 @@
       </p:sp>
       <p:sp>
         <p:nvSpPr>
-          <p:cNvPr id="47" name="Text 45"/>
-          <p:cNvSpPr/>
-          <p:nvPr/>
-        </p:nvSpPr>
-        <p:spPr>
-          <a:xfrm>
-            <a:off x="7447135" y="4169664"/>
+          <p:cNvPr id="53" name="Text 51"/>
+          <p:cNvSpPr/>
+          <p:nvPr/>
+        </p:nvSpPr>
+        <p:spPr>
+          <a:xfrm>
+            <a:off x="6062472" y="4169664"/>
             <a:ext cx="685800" cy="384048"/>
           </a:xfrm>
           <a:prstGeom prst="rect">
@@ -28563,6 +29307,72 @@
                 <a:ea typeface="Trebuchet MS" pitchFamily="34" charset="-122"/>
                 <a:cs typeface="Trebuchet MS" pitchFamily="34" charset="-120"/>
               </a:rPr>
+              <a:t>a</a:t>
+            </a:r>
+            <a:endParaRPr lang="en-US" sz="900" dirty="0"/>
+          </a:p>
+        </p:txBody>
+      </p:sp>
+      <p:sp>
+        <p:nvSpPr>
+          <p:cNvPr id="54" name="Shape 52"/>
+          <p:cNvSpPr/>
+          <p:nvPr/>
+        </p:nvSpPr>
+        <p:spPr>
+          <a:xfrm>
+            <a:off x="6870192" y="4169664"/>
+            <a:ext cx="685800" cy="384048"/>
+          </a:xfrm>
+          <a:prstGeom prst="rect">
+            <a:avLst>
+              <a:gd name="adj" fmla="val 9524"/>
+            </a:avLst>
+          </a:prstGeom>
+          <a:solidFill>
+            <a:srgbClr val="FFFFFF"/>
+          </a:solidFill>
+          <a:ln w="12700">
+            <a:solidFill>
+              <a:srgbClr val="DB2777"/>
+            </a:solidFill>
+            <a:prstDash val="solid"/>
+          </a:ln>
+        </p:spPr>
+      </p:sp>
+      <p:sp>
+        <p:nvSpPr>
+          <p:cNvPr id="55" name="Text 53"/>
+          <p:cNvSpPr/>
+          <p:nvPr/>
+        </p:nvSpPr>
+        <p:spPr>
+          <a:xfrm>
+            <a:off x="6870192" y="4169664"/>
+            <a:ext cx="685800" cy="384048"/>
+          </a:xfrm>
+          <a:prstGeom prst="rect">
+            <a:avLst/>
+          </a:prstGeom>
+          <a:noFill/>
+          <a:ln/>
+        </p:spPr>
+        <p:txBody>
+          <a:bodyPr wrap="square" lIns="0" tIns="0" rIns="0" bIns="0" rtlCol="0" anchor="ctr"/>
+          <a:lstStyle/>
+          <a:p>
+            <a:pPr algn="ctr" indent="0" marL="0">
+              <a:buNone/>
+            </a:pPr>
+            <a:r>
+              <a:rPr lang="en-US" sz="900" b="1" dirty="0">
+                <a:solidFill>
+                  <a:srgbClr val="9D174D"/>
+                </a:solidFill>
+                <a:latin typeface="Trebuchet MS" pitchFamily="34" charset="0"/>
+                <a:ea typeface="Trebuchet MS" pitchFamily="34" charset="-122"/>
+                <a:cs typeface="Trebuchet MS" pitchFamily="34" charset="-120"/>
+              </a:rPr>
               <a:t>ph</a:t>
             </a:r>
             <a:endParaRPr lang="en-US" sz="900" dirty="0"/>
@@ -28571,13 +29381,13 @@
       </p:sp>
       <p:sp>
         <p:nvSpPr>
-          <p:cNvPr id="48" name="Text 46"/>
-          <p:cNvSpPr/>
-          <p:nvPr/>
-        </p:nvSpPr>
-        <p:spPr>
-          <a:xfrm>
-            <a:off x="7447135" y="4572000"/>
+          <p:cNvPr id="56" name="Text 54"/>
+          <p:cNvSpPr/>
+          <p:nvPr/>
+        </p:nvSpPr>
+        <p:spPr>
+          <a:xfrm>
+            <a:off x="6870192" y="4572000"/>
             <a:ext cx="685800" cy="219456"/>
           </a:xfrm>
           <a:prstGeom prst="rect">
@@ -28605,6 +29415,72 @@
               <a:t>/f/</a:t>
             </a:r>
             <a:endParaRPr lang="en-US" sz="750" dirty="0"/>
+          </a:p>
+        </p:txBody>
+      </p:sp>
+      <p:sp>
+        <p:nvSpPr>
+          <p:cNvPr id="57" name="Shape 55"/>
+          <p:cNvSpPr/>
+          <p:nvPr/>
+        </p:nvSpPr>
+        <p:spPr>
+          <a:xfrm>
+            <a:off x="7677912" y="4169664"/>
+            <a:ext cx="685800" cy="384048"/>
+          </a:xfrm>
+          <a:prstGeom prst="rect">
+            <a:avLst>
+              <a:gd name="adj" fmla="val 9524"/>
+            </a:avLst>
+          </a:prstGeom>
+          <a:solidFill>
+            <a:srgbClr val="FFFFFF"/>
+          </a:solidFill>
+          <a:ln w="12700">
+            <a:solidFill>
+              <a:srgbClr val="DB2777"/>
+            </a:solidFill>
+            <a:prstDash val="solid"/>
+          </a:ln>
+        </p:spPr>
+      </p:sp>
+      <p:sp>
+        <p:nvSpPr>
+          <p:cNvPr id="58" name="Text 56"/>
+          <p:cNvSpPr/>
+          <p:nvPr/>
+        </p:nvSpPr>
+        <p:spPr>
+          <a:xfrm>
+            <a:off x="7677912" y="4169664"/>
+            <a:ext cx="685800" cy="384048"/>
+          </a:xfrm>
+          <a:prstGeom prst="rect">
+            <a:avLst/>
+          </a:prstGeom>
+          <a:noFill/>
+          <a:ln/>
+        </p:spPr>
+        <p:txBody>
+          <a:bodyPr wrap="square" lIns="0" tIns="0" rIns="0" bIns="0" rtlCol="0" anchor="ctr"/>
+          <a:lstStyle/>
+          <a:p>
+            <a:pPr algn="ctr" indent="0" marL="0">
+              <a:buNone/>
+            </a:pPr>
+            <a:r>
+              <a:rPr lang="en-US" sz="900" b="1" dirty="0">
+                <a:solidFill>
+                  <a:srgbClr val="9D174D"/>
+                </a:solidFill>
+                <a:latin typeface="Trebuchet MS" pitchFamily="34" charset="0"/>
+                <a:ea typeface="Trebuchet MS" pitchFamily="34" charset="-122"/>
+                <a:cs typeface="Trebuchet MS" pitchFamily="34" charset="-120"/>
+              </a:rPr>
+              <a:t>y</a:t>
+            </a:r>
+            <a:endParaRPr lang="en-US" sz="900" dirty="0"/>
           </a:p>
         </p:txBody>
       </p:sp>
@@ -30038,7 +30914,7 @@
                 <a:ea typeface="Calibri" pitchFamily="34" charset="-122"/>
                 <a:cs typeface="Calibri" pitchFamily="34" charset="-120"/>
               </a:rPr>
-              <a:t>write, draw, record</a:t>
+              <a:t>write, record</a:t>
             </a:r>
             <a:endParaRPr lang="en-US" sz="850" dirty="0"/>
           </a:p>
@@ -31023,7 +31899,7 @@
                 <a:ea typeface="Calibri" pitchFamily="34" charset="-122"/>
                 <a:cs typeface="Calibri" pitchFamily="34" charset="-120"/>
               </a:rPr>
-              <a:t>write, draw, record</a:t>
+              <a:t>write, record</a:t>
             </a:r>
             <a:endParaRPr lang="en-US" sz="850" dirty="0"/>
           </a:p>
@@ -32140,7 +33016,7 @@
                 <a:ea typeface="Calibri" pitchFamily="34" charset="-122"/>
                 <a:cs typeface="Calibri" pitchFamily="34" charset="-120"/>
               </a:rPr>
-              <a:t>write, draw, record</a:t>
+              <a:t>write, record</a:t>
             </a:r>
             <a:endParaRPr lang="en-US" sz="850" dirty="0"/>
           </a:p>
@@ -32623,7 +33499,7 @@
         </p:nvSpPr>
         <p:spPr>
           <a:xfrm>
-            <a:off x="2427732" y="4169664"/>
+            <a:off x="2254649" y="4169664"/>
             <a:ext cx="685800" cy="384048"/>
           </a:xfrm>
           <a:prstGeom prst="rect">
@@ -32650,7 +33526,7 @@
         </p:nvSpPr>
         <p:spPr>
           <a:xfrm>
-            <a:off x="2427732" y="4169664"/>
+            <a:off x="2254649" y="4169664"/>
             <a:ext cx="685800" cy="384048"/>
           </a:xfrm>
           <a:prstGeom prst="rect">
@@ -32675,7 +33551,7 @@
                 <a:ea typeface="Trebuchet MS" pitchFamily="34" charset="-122"/>
                 <a:cs typeface="Trebuchet MS" pitchFamily="34" charset="-120"/>
               </a:rPr>
-              <a:t>gr</a:t>
+              <a:t>g</a:t>
             </a:r>
             <a:endParaRPr lang="en-US" sz="900" dirty="0"/>
           </a:p>
@@ -32689,7 +33565,7 @@
         </p:nvSpPr>
         <p:spPr>
           <a:xfrm>
-            <a:off x="3639312" y="4169664"/>
+            <a:off x="3293146" y="4169664"/>
             <a:ext cx="685800" cy="384048"/>
           </a:xfrm>
           <a:prstGeom prst="rect">
@@ -32716,7 +33592,7 @@
         </p:nvSpPr>
         <p:spPr>
           <a:xfrm>
-            <a:off x="3639312" y="4169664"/>
+            <a:off x="3293146" y="4169664"/>
             <a:ext cx="685800" cy="384048"/>
           </a:xfrm>
           <a:prstGeom prst="rect">
@@ -32741,7 +33617,7 @@
                 <a:ea typeface="Trebuchet MS" pitchFamily="34" charset="-122"/>
                 <a:cs typeface="Trebuchet MS" pitchFamily="34" charset="-120"/>
               </a:rPr>
-              <a:t>a</a:t>
+              <a:t>r</a:t>
             </a:r>
             <a:endParaRPr lang="en-US" sz="900" dirty="0"/>
           </a:p>
@@ -32755,7 +33631,7 @@
         </p:nvSpPr>
         <p:spPr>
           <a:xfrm>
-            <a:off x="4850892" y="4169664"/>
+            <a:off x="4331643" y="4169664"/>
             <a:ext cx="685800" cy="384048"/>
           </a:xfrm>
           <a:prstGeom prst="rect">
@@ -32782,7 +33658,7 @@
         </p:nvSpPr>
         <p:spPr>
           <a:xfrm>
-            <a:off x="4850892" y="4169664"/>
+            <a:off x="4331643" y="4169664"/>
             <a:ext cx="685800" cy="384048"/>
           </a:xfrm>
           <a:prstGeom prst="rect">
@@ -32807,6 +33683,72 @@
                 <a:ea typeface="Trebuchet MS" pitchFamily="34" charset="-122"/>
                 <a:cs typeface="Trebuchet MS" pitchFamily="34" charset="-120"/>
               </a:rPr>
+              <a:t>a</a:t>
+            </a:r>
+            <a:endParaRPr lang="en-US" sz="900" dirty="0"/>
+          </a:p>
+        </p:txBody>
+      </p:sp>
+      <p:sp>
+        <p:nvSpPr>
+          <p:cNvPr id="39" name="Shape 37"/>
+          <p:cNvSpPr/>
+          <p:nvPr/>
+        </p:nvSpPr>
+        <p:spPr>
+          <a:xfrm>
+            <a:off x="5370141" y="4169664"/>
+            <a:ext cx="685800" cy="384048"/>
+          </a:xfrm>
+          <a:prstGeom prst="rect">
+            <a:avLst>
+              <a:gd name="adj" fmla="val 9524"/>
+            </a:avLst>
+          </a:prstGeom>
+          <a:solidFill>
+            <a:srgbClr val="FFFFFF"/>
+          </a:solidFill>
+          <a:ln w="12700">
+            <a:solidFill>
+              <a:srgbClr val="DB2777"/>
+            </a:solidFill>
+            <a:prstDash val="solid"/>
+          </a:ln>
+        </p:spPr>
+      </p:sp>
+      <p:sp>
+        <p:nvSpPr>
+          <p:cNvPr id="40" name="Text 38"/>
+          <p:cNvSpPr/>
+          <p:nvPr/>
+        </p:nvSpPr>
+        <p:spPr>
+          <a:xfrm>
+            <a:off x="5370141" y="4169664"/>
+            <a:ext cx="685800" cy="384048"/>
+          </a:xfrm>
+          <a:prstGeom prst="rect">
+            <a:avLst/>
+          </a:prstGeom>
+          <a:noFill/>
+          <a:ln/>
+        </p:spPr>
+        <p:txBody>
+          <a:bodyPr wrap="square" lIns="0" tIns="0" rIns="0" bIns="0" rtlCol="0" anchor="ctr"/>
+          <a:lstStyle/>
+          <a:p>
+            <a:pPr algn="ctr" indent="0" marL="0">
+              <a:buNone/>
+            </a:pPr>
+            <a:r>
+              <a:rPr lang="en-US" sz="900" b="1" dirty="0">
+                <a:solidFill>
+                  <a:srgbClr val="9D174D"/>
+                </a:solidFill>
+                <a:latin typeface="Trebuchet MS" pitchFamily="34" charset="0"/>
+                <a:ea typeface="Trebuchet MS" pitchFamily="34" charset="-122"/>
+                <a:cs typeface="Trebuchet MS" pitchFamily="34" charset="-120"/>
+              </a:rPr>
               <a:t>ph</a:t>
             </a:r>
             <a:endParaRPr lang="en-US" sz="900" dirty="0"/>
@@ -32815,13 +33757,13 @@
       </p:sp>
       <p:sp>
         <p:nvSpPr>
-          <p:cNvPr id="39" name="Text 37"/>
-          <p:cNvSpPr/>
-          <p:nvPr/>
-        </p:nvSpPr>
-        <p:spPr>
-          <a:xfrm>
-            <a:off x="4850892" y="4572000"/>
+          <p:cNvPr id="41" name="Text 39"/>
+          <p:cNvSpPr/>
+          <p:nvPr/>
+        </p:nvSpPr>
+        <p:spPr>
+          <a:xfrm>
+            <a:off x="5370141" y="4572000"/>
             <a:ext cx="685800" cy="219456"/>
           </a:xfrm>
           <a:prstGeom prst="rect">
@@ -32854,13 +33796,13 @@
       </p:sp>
       <p:sp>
         <p:nvSpPr>
-          <p:cNvPr id="40" name="Shape 38"/>
-          <p:cNvSpPr/>
-          <p:nvPr/>
-        </p:nvSpPr>
-        <p:spPr>
-          <a:xfrm>
-            <a:off x="6062472" y="4169664"/>
+          <p:cNvPr id="42" name="Shape 40"/>
+          <p:cNvSpPr/>
+          <p:nvPr/>
+        </p:nvSpPr>
+        <p:spPr>
+          <a:xfrm>
+            <a:off x="6408638" y="4169664"/>
             <a:ext cx="685800" cy="384048"/>
           </a:xfrm>
           <a:prstGeom prst="rect">
@@ -32881,13 +33823,13 @@
       </p:sp>
       <p:sp>
         <p:nvSpPr>
-          <p:cNvPr id="41" name="Text 39"/>
-          <p:cNvSpPr/>
-          <p:nvPr/>
-        </p:nvSpPr>
-        <p:spPr>
-          <a:xfrm>
-            <a:off x="6062472" y="4169664"/>
+          <p:cNvPr id="43" name="Text 41"/>
+          <p:cNvSpPr/>
+          <p:nvPr/>
+        </p:nvSpPr>
+        <p:spPr>
+          <a:xfrm>
+            <a:off x="6408638" y="4169664"/>
             <a:ext cx="685800" cy="384048"/>
           </a:xfrm>
           <a:prstGeom prst="rect">
@@ -32920,13 +33862,13 @@
       </p:sp>
       <p:sp>
         <p:nvSpPr>
-          <p:cNvPr id="42" name="Shape 40"/>
-          <p:cNvSpPr/>
-          <p:nvPr/>
-        </p:nvSpPr>
-        <p:spPr>
-          <a:xfrm>
-            <a:off x="7274052" y="4169664"/>
+          <p:cNvPr id="44" name="Shape 42"/>
+          <p:cNvSpPr/>
+          <p:nvPr/>
+        </p:nvSpPr>
+        <p:spPr>
+          <a:xfrm>
+            <a:off x="7447135" y="4169664"/>
             <a:ext cx="685800" cy="384048"/>
           </a:xfrm>
           <a:prstGeom prst="rect">
@@ -32947,13 +33889,13 @@
       </p:sp>
       <p:sp>
         <p:nvSpPr>
-          <p:cNvPr id="43" name="Text 41"/>
-          <p:cNvSpPr/>
-          <p:nvPr/>
-        </p:nvSpPr>
-        <p:spPr>
-          <a:xfrm>
-            <a:off x="7274052" y="4169664"/>
+          <p:cNvPr id="45" name="Text 43"/>
+          <p:cNvSpPr/>
+          <p:nvPr/>
+        </p:nvSpPr>
+        <p:spPr>
+          <a:xfrm>
+            <a:off x="7447135" y="4169664"/>
             <a:ext cx="685800" cy="384048"/>
           </a:xfrm>
           <a:prstGeom prst="rect">
@@ -32986,13 +33928,13 @@
       </p:sp>
       <p:sp>
         <p:nvSpPr>
-          <p:cNvPr id="44" name="Text 42"/>
-          <p:cNvSpPr/>
-          <p:nvPr/>
-        </p:nvSpPr>
-        <p:spPr>
-          <a:xfrm>
-            <a:off x="7274052" y="4572000"/>
+          <p:cNvPr id="46" name="Text 44"/>
+          <p:cNvSpPr/>
+          <p:nvPr/>
+        </p:nvSpPr>
+        <p:spPr>
+          <a:xfrm>
+            <a:off x="7447135" y="4572000"/>
             <a:ext cx="685800" cy="219456"/>
           </a:xfrm>
           <a:prstGeom prst="rect">
@@ -35060,7 +36002,7 @@
                 <a:ea typeface="Trebuchet MS" pitchFamily="34" charset="-122"/>
                 <a:cs typeface="Trebuchet MS" pitchFamily="34" charset="-120"/>
               </a:rPr>
-              <a:t>-ics</a:t>
+              <a:t>-er</a:t>
             </a:r>
             <a:endParaRPr lang="en-US" sz="1300" dirty="0"/>
           </a:p>
@@ -35213,7 +36155,7 @@
                 <a:ea typeface="Trebuchet MS" pitchFamily="34" charset="-122"/>
                 <a:cs typeface="Trebuchet MS" pitchFamily="34" charset="-120"/>
               </a:rPr>
-              <a:t>-er</a:t>
+              <a:t>-y</a:t>
             </a:r>
             <a:endParaRPr lang="en-US" sz="1300" dirty="0"/>
           </a:p>
@@ -35366,7 +36308,7 @@
                 <a:ea typeface="Trebuchet MS" pitchFamily="34" charset="-122"/>
                 <a:cs typeface="Trebuchet MS" pitchFamily="34" charset="-120"/>
               </a:rPr>
-              <a:t>-y</a:t>
+              <a:t>-ics</a:t>
             </a:r>
             <a:endParaRPr lang="en-US" sz="1300" dirty="0"/>
           </a:p>
@@ -35756,7 +36698,7 @@
                 <a:ea typeface="Trebuchet MS" pitchFamily="34" charset="-122"/>
                 <a:cs typeface="Trebuchet MS" pitchFamily="34" charset="-120"/>
               </a:rPr>
-              <a:t>paragraph</a:t>
+              <a:t>biography</a:t>
             </a:r>
             <a:endParaRPr lang="en-US" sz="1200" dirty="0"/>
           </a:p>
@@ -35822,7 +36764,7 @@
                 <a:ea typeface="Trebuchet MS" pitchFamily="34" charset="-122"/>
                 <a:cs typeface="Trebuchet MS" pitchFamily="34" charset="-120"/>
               </a:rPr>
-              <a:t>biography</a:t>
+              <a:t>paragraph</a:t>
             </a:r>
             <a:endParaRPr lang="en-US" sz="1200" dirty="0"/>
           </a:p>
@@ -35888,7 +36830,7 @@
                 <a:ea typeface="Trebuchet MS" pitchFamily="34" charset="-122"/>
                 <a:cs typeface="Trebuchet MS" pitchFamily="34" charset="-120"/>
               </a:rPr>
-              <a:t>telegraph</a:t>
+              <a:t>geography</a:t>
             </a:r>
             <a:endParaRPr lang="en-US" sz="1200" dirty="0"/>
           </a:p>
@@ -35954,7 +36896,7 @@
                 <a:ea typeface="Trebuchet MS" pitchFamily="34" charset="-122"/>
                 <a:cs typeface="Trebuchet MS" pitchFamily="34" charset="-120"/>
               </a:rPr>
-              <a:t>graphic</a:t>
+              <a:t>telegraph</a:t>
             </a:r>
             <a:endParaRPr lang="en-US" sz="1200" dirty="0"/>
           </a:p>
@@ -36020,7 +36962,7 @@
                 <a:ea typeface="Trebuchet MS" pitchFamily="34" charset="-122"/>
                 <a:cs typeface="Trebuchet MS" pitchFamily="34" charset="-120"/>
               </a:rPr>
-              <a:t>geography</a:t>
+              <a:t>graphic</a:t>
             </a:r>
             <a:endParaRPr lang="en-US" sz="1200" dirty="0"/>
           </a:p>
@@ -36086,7 +37028,7 @@
                 <a:ea typeface="Trebuchet MS" pitchFamily="34" charset="-122"/>
                 <a:cs typeface="Trebuchet MS" pitchFamily="34" charset="-120"/>
               </a:rPr>
-              <a:t>phonograph</a:t>
+              <a:t>photographer</a:t>
             </a:r>
             <a:endParaRPr lang="en-US" sz="1200" dirty="0"/>
           </a:p>
@@ -37413,7 +38355,7 @@
                 <a:ea typeface="Calibri" pitchFamily="34" charset="-122"/>
                 <a:cs typeface="Calibri" pitchFamily="34" charset="-120"/>
               </a:rPr>
-              <a:t>2.  The word 'autograph' means a photo taken automatically by a machine.</a:t>
+              <a:t>2.  The root 'graph' can be found in the word 'autograph'.</a:t>
             </a:r>
             <a:endParaRPr lang="en-US" sz="1300" dirty="0"/>
           </a:p>
@@ -37436,11 +38378,11 @@
             </a:avLst>
           </a:prstGeom>
           <a:solidFill>
-            <a:srgbClr val="FEE2E2"/>
-          </a:solidFill>
-          <a:ln w="12700">
-            <a:solidFill>
-              <a:srgbClr val="DC2626"/>
+            <a:srgbClr val="DCFCE7"/>
+          </a:solidFill>
+          <a:ln w="12700">
+            <a:solidFill>
+              <a:srgbClr val="16A34A"/>
             </a:solidFill>
             <a:prstDash val="solid"/>
           </a:ln>
@@ -37473,13 +38415,13 @@
             <a:r>
               <a:rPr lang="en-US" sz="1100" b="1" dirty="0">
                 <a:solidFill>
-                  <a:srgbClr val="DC2626"/>
+                  <a:srgbClr val="16A34A"/>
                 </a:solidFill>
                 <a:latin typeface="Trebuchet MS" pitchFamily="34" charset="0"/>
                 <a:ea typeface="Trebuchet MS" pitchFamily="34" charset="-122"/>
                 <a:cs typeface="Trebuchet MS" pitchFamily="34" charset="-120"/>
               </a:rPr>
-              <a:t>FALSE</a:t>
+              <a:t>TRUE</a:t>
             </a:r>
             <a:endParaRPr lang="en-US" sz="1100" dirty="0"/>
           </a:p>
@@ -37552,7 +38494,7 @@
                 <a:ea typeface="Calibri" pitchFamily="34" charset="-122"/>
                 <a:cs typeface="Calibri" pitchFamily="34" charset="-120"/>
               </a:rPr>
-              <a:t>3.  A paragraph is a section of writing, and it contains the root 'graph'.</a:t>
+              <a:t>3.  A photographer is someone connected to recording images.</a:t>
             </a:r>
             <a:endParaRPr lang="en-US" sz="1300" dirty="0"/>
           </a:p>
@@ -37691,7 +38633,7 @@
                 <a:ea typeface="Calibri" pitchFamily="34" charset="-122"/>
                 <a:cs typeface="Calibri" pitchFamily="34" charset="-120"/>
               </a:rPr>
-              <a:t>4.  The root 'graph' appears in words related to writing, drawing, and recording.</a:t>
+              <a:t>4.  The word 'paragraph' has nothing to do with writing or marking.</a:t>
             </a:r>
             <a:endParaRPr lang="en-US" sz="1300" dirty="0"/>
           </a:p>
@@ -37714,11 +38656,11 @@
             </a:avLst>
           </a:prstGeom>
           <a:solidFill>
-            <a:srgbClr val="DCFCE7"/>
-          </a:solidFill>
-          <a:ln w="12700">
-            <a:solidFill>
-              <a:srgbClr val="16A34A"/>
+            <a:srgbClr val="FEE2E2"/>
+          </a:solidFill>
+          <a:ln w="12700">
+            <a:solidFill>
+              <a:srgbClr val="DC2626"/>
             </a:solidFill>
             <a:prstDash val="solid"/>
           </a:ln>
@@ -37751,13 +38693,13 @@
             <a:r>
               <a:rPr lang="en-US" sz="1100" b="1" dirty="0">
                 <a:solidFill>
-                  <a:srgbClr val="16A34A"/>
+                  <a:srgbClr val="DC2626"/>
                 </a:solidFill>
                 <a:latin typeface="Trebuchet MS" pitchFamily="34" charset="0"/>
                 <a:ea typeface="Trebuchet MS" pitchFamily="34" charset="-122"/>
                 <a:cs typeface="Trebuchet MS" pitchFamily="34" charset="-120"/>
               </a:rPr>
-              <a:t>TRUE</a:t>
+              <a:t>FALSE</a:t>
             </a:r>
             <a:endParaRPr lang="en-US" sz="1100" dirty="0"/>
           </a:p>
@@ -37830,7 +38772,7 @@
                 <a:ea typeface="Calibri" pitchFamily="34" charset="-122"/>
                 <a:cs typeface="Calibri" pitchFamily="34" charset="-120"/>
               </a:rPr>
-              <a:t>5.  The root 'graph' originally came from a Latin word meaning to speak.</a:t>
+              <a:t>5.  The root 'graph' comes from Latin and means to speak.</a:t>
             </a:r>
             <a:endParaRPr lang="en-US" sz="1300" dirty="0"/>
           </a:p>
@@ -38601,7 +39543,7 @@
                 <a:ea typeface="Trebuchet MS" pitchFamily="34" charset="-122"/>
                 <a:cs typeface="Trebuchet MS" pitchFamily="34" charset="-120"/>
               </a:rPr>
-              <a:t>paragraph</a:t>
+              <a:t>biography</a:t>
             </a:r>
             <a:endParaRPr lang="en-US" sz="1300" dirty="0"/>
           </a:p>
@@ -38667,7 +39609,7 @@
                 <a:ea typeface="Trebuchet MS" pitchFamily="34" charset="-122"/>
                 <a:cs typeface="Trebuchet MS" pitchFamily="34" charset="-120"/>
               </a:rPr>
-              <a:t>biography</a:t>
+              <a:t>paragraph</a:t>
             </a:r>
             <a:endParaRPr lang="en-US" sz="1300" dirty="0"/>
           </a:p>
@@ -38733,7 +39675,7 @@
                 <a:ea typeface="Trebuchet MS" pitchFamily="34" charset="-122"/>
                 <a:cs typeface="Trebuchet MS" pitchFamily="34" charset="-120"/>
               </a:rPr>
-              <a:t>telegraph</a:t>
+              <a:t>geography</a:t>
             </a:r>
             <a:endParaRPr lang="en-US" sz="1300" dirty="0"/>
           </a:p>
@@ -38799,7 +39741,7 @@
                 <a:ea typeface="Trebuchet MS" pitchFamily="34" charset="-122"/>
                 <a:cs typeface="Trebuchet MS" pitchFamily="34" charset="-120"/>
               </a:rPr>
-              <a:t>graphic</a:t>
+              <a:t>telegraph</a:t>
             </a:r>
             <a:endParaRPr lang="en-US" sz="1300" dirty="0"/>
           </a:p>
@@ -38865,7 +39807,7 @@
                 <a:ea typeface="Trebuchet MS" pitchFamily="34" charset="-122"/>
                 <a:cs typeface="Trebuchet MS" pitchFamily="34" charset="-120"/>
               </a:rPr>
-              <a:t>geography</a:t>
+              <a:t>graphic</a:t>
             </a:r>
             <a:endParaRPr lang="en-US" sz="1300" dirty="0"/>
           </a:p>
@@ -39739,7 +40681,7 @@
                 <a:ea typeface="Trebuchet MS" pitchFamily="34" charset="-122"/>
                 <a:cs typeface="Trebuchet MS" pitchFamily="34" charset="-120"/>
               </a:rPr>
-              <a:t>-ics</a:t>
+              <a:t>-er</a:t>
             </a:r>
             <a:endParaRPr lang="en-US" sz="1300" dirty="0"/>
           </a:p>
@@ -39892,7 +40834,7 @@
                 <a:ea typeface="Trebuchet MS" pitchFamily="34" charset="-122"/>
                 <a:cs typeface="Trebuchet MS" pitchFamily="34" charset="-120"/>
               </a:rPr>
-              <a:t>-er</a:t>
+              <a:t>-y</a:t>
             </a:r>
             <a:endParaRPr lang="en-US" sz="1300" dirty="0"/>
           </a:p>
@@ -40045,7 +40987,7 @@
                 <a:ea typeface="Trebuchet MS" pitchFamily="34" charset="-122"/>
                 <a:cs typeface="Trebuchet MS" pitchFamily="34" charset="-120"/>
               </a:rPr>
-              <a:t>-y</a:t>
+              <a:t>-ics</a:t>
             </a:r>
             <a:endParaRPr lang="en-US" sz="1300" dirty="0"/>
           </a:p>
@@ -41109,7 +42051,7 @@
                 <a:ea typeface="Calibri" pitchFamily="34" charset="-122"/>
                 <a:cs typeface="Calibri" pitchFamily="34" charset="-120"/>
               </a:rPr>
-              <a:t>The study of the Earth, including its land, oceans, countries, and people.</a:t>
+              <a:t>A drawing, image, or picture used to show information.</a:t>
             </a:r>
             <a:endParaRPr lang="en-US" sz="1200" dirty="0"/>
           </a:p>
@@ -41248,7 +42190,7 @@
                 <a:ea typeface="Calibri" pitchFamily="34" charset="-122"/>
                 <a:cs typeface="Calibri" pitchFamily="34" charset="-120"/>
               </a:rPr>
-              <a:t>A group of sentences that are all about the same idea, set apart in a piece of writing.</a:t>
+              <a:t>A book written about someone else's life.</a:t>
             </a:r>
             <a:endParaRPr lang="en-US" sz="1200" dirty="0"/>
           </a:p>
@@ -41321,7 +42263,7 @@
                 <a:ea typeface="Trebuchet MS" pitchFamily="34" charset="-122"/>
                 <a:cs typeface="Trebuchet MS" pitchFamily="34" charset="-120"/>
               </a:rPr>
-              <a:t>paragraph</a:t>
+              <a:t>biography</a:t>
             </a:r>
             <a:endParaRPr lang="en-US" sz="1200" dirty="0"/>
           </a:p>
@@ -41387,7 +42329,7 @@
                 <a:ea typeface="Calibri" pitchFamily="34" charset="-122"/>
                 <a:cs typeface="Calibri" pitchFamily="34" charset="-120"/>
               </a:rPr>
-              <a:t>An old machine that sent messages over long distances using electrical signals.</a:t>
+              <a:t>The study of Earth's lands, features, and places.</a:t>
             </a:r>
             <a:endParaRPr lang="en-US" sz="1200" dirty="0"/>
           </a:p>
@@ -41460,7 +42402,7 @@
                 <a:ea typeface="Trebuchet MS" pitchFamily="34" charset="-122"/>
                 <a:cs typeface="Trebuchet MS" pitchFamily="34" charset="-120"/>
               </a:rPr>
-              <a:t>biography</a:t>
+              <a:t>paragraph</a:t>
             </a:r>
             <a:endParaRPr lang="en-US" sz="1200" dirty="0"/>
           </a:p>
@@ -41526,7 +42468,7 @@
                 <a:ea typeface="Calibri" pitchFamily="34" charset="-122"/>
                 <a:cs typeface="Calibri" pitchFamily="34" charset="-120"/>
               </a:rPr>
-              <a:t>Something to do with drawing, pictures, or visual images.</a:t>
+              <a:t>An old machine that sent messages over long distances using electrical signals.</a:t>
             </a:r>
             <a:endParaRPr lang="en-US" sz="1200" dirty="0"/>
           </a:p>
@@ -41599,7 +42541,7 @@
                 <a:ea typeface="Trebuchet MS" pitchFamily="34" charset="-122"/>
                 <a:cs typeface="Trebuchet MS" pitchFamily="34" charset="-120"/>
               </a:rPr>
-              <a:t>telegraph</a:t>
+              <a:t>geography</a:t>
             </a:r>
             <a:endParaRPr lang="en-US" sz="1200" dirty="0"/>
           </a:p>
@@ -41665,7 +42607,7 @@
                 <a:ea typeface="Calibri" pitchFamily="34" charset="-122"/>
                 <a:cs typeface="Calibri" pitchFamily="34" charset="-120"/>
               </a:rPr>
-              <a:t>A book written about the true story of another person's life.</a:t>
+              <a:t>A group of sentences about one idea in a piece of writing.</a:t>
             </a:r>
             <a:endParaRPr lang="en-US" sz="1200" dirty="0"/>
           </a:p>
@@ -41738,7 +42680,7 @@
                 <a:ea typeface="Trebuchet MS" pitchFamily="34" charset="-122"/>
                 <a:cs typeface="Trebuchet MS" pitchFamily="34" charset="-120"/>
               </a:rPr>
-              <a:t>graphic</a:t>
+              <a:t>telegraph</a:t>
             </a:r>
             <a:endParaRPr lang="en-US" sz="1200" dirty="0"/>
           </a:p>
@@ -41804,7 +42746,7 @@
                 <a:ea typeface="Calibri" pitchFamily="34" charset="-122"/>
                 <a:cs typeface="Calibri" pitchFamily="34" charset="-120"/>
               </a:rPr>
-              <a:t>A picture taken by a camera that captures light to record an image.</a:t>
+              <a:t>A picture taken by a camera using light.</a:t>
             </a:r>
             <a:endParaRPr lang="en-US" sz="1200" dirty="0"/>
           </a:p>
@@ -41877,7 +42819,7 @@
                 <a:ea typeface="Trebuchet MS" pitchFamily="34" charset="-122"/>
                 <a:cs typeface="Trebuchet MS" pitchFamily="34" charset="-120"/>
               </a:rPr>
-              <a:t>geography</a:t>
+              <a:t>graphic</a:t>
             </a:r>
             <a:endParaRPr lang="en-US" sz="1200" dirty="0"/>
           </a:p>
@@ -41943,7 +42885,7 @@
                 <a:ea typeface="Calibri" pitchFamily="34" charset="-122"/>
                 <a:cs typeface="Calibri" pitchFamily="34" charset="-120"/>
               </a:rPr>
-              <a:t>A famous person's signature written by their own hand.</a:t>
+              <a:t>A famous person's signature written by hand.</a:t>
             </a:r>
             <a:endParaRPr lang="en-US" sz="1200" dirty="0"/>
           </a:p>
@@ -42438,7 +43380,7 @@
                 <a:ea typeface="Calibri" pitchFamily="34" charset="-122"/>
                 <a:cs typeface="Calibri" pitchFamily="34" charset="-120"/>
               </a:rPr>
-              <a:t>The scientist used a photograph to record what the rare bird looked like in the wild.</a:t>
+              <a:t>The students used a bar graph to display the results of their science experiment.</a:t>
             </a:r>
             <a:endParaRPr lang="en-US" sz="1500" dirty="0"/>
           </a:p>
@@ -42602,7 +43544,7 @@
                 <a:ea typeface="Calibri" pitchFamily="34" charset="-122"/>
                 <a:cs typeface="Calibri" pitchFamily="34" charset="-120"/>
               </a:rPr>
-              <a:t>We each had to write a paragraph explaining why we think the environment is important.</a:t>
+              <a:t>She was thrilled to receive an autograph from her favourite author at the book fair.</a:t>
             </a:r>
             <a:endParaRPr lang="en-US" sz="1500" dirty="0"/>
           </a:p>
@@ -42766,7 +43708,7 @@
                 <a:ea typeface="Calibri" pitchFamily="34" charset="-122"/>
                 <a:cs typeface="Calibri" pitchFamily="34" charset="-120"/>
               </a:rPr>
-              <a:t>The pop star's autograph was framed and hung proudly on the bedroom wall.</a:t>
+              <a:t>The photographer carefully set up his camera to capture the sunset over the harbour.</a:t>
             </a:r>
             <a:endParaRPr lang="en-US" sz="1500" dirty="0"/>
           </a:p>
